--- a/docs/showcase/deliverables/kars-pitch-deck.pptx
+++ b/docs/showcase/deliverables/kars-pitch-deck.pptx
@@ -3714,8 +3714,8 @@
         </p:nvSpPr>
         <p:spPr>
           <a:xfrm>
-            <a:off x="-1165860" y="3657600"/>
-            <a:ext cx="3520440" cy="914400"/>
+            <a:off x="571500" y="3657600"/>
+            <a:ext cx="2651760" cy="914400"/>
           </a:xfrm>
           <a:prstGeom prst="rect">
             <a:avLst/>
@@ -3739,8 +3739,8 @@
         </p:nvSpPr>
         <p:spPr>
           <a:xfrm>
-            <a:off x="-982980" y="3794760"/>
-            <a:ext cx="3154680" cy="365760"/>
+            <a:off x="754380" y="3794760"/>
+            <a:ext cx="2286000" cy="365760"/>
           </a:xfrm>
           <a:prstGeom prst="rect">
             <a:avLst/>
@@ -3778,8 +3778,8 @@
         </p:nvSpPr>
         <p:spPr>
           <a:xfrm>
-            <a:off x="-982980" y="4160520"/>
-            <a:ext cx="3154680" cy="365760"/>
+            <a:off x="754380" y="4160520"/>
+            <a:ext cx="2286000" cy="365760"/>
           </a:xfrm>
           <a:prstGeom prst="rect">
             <a:avLst/>
@@ -3817,8 +3817,8 @@
         </p:nvSpPr>
         <p:spPr>
           <a:xfrm>
-            <a:off x="2491740" y="3657600"/>
-            <a:ext cx="3520440" cy="914400"/>
+            <a:off x="3360420" y="3657600"/>
+            <a:ext cx="2651760" cy="914400"/>
           </a:xfrm>
           <a:prstGeom prst="rect">
             <a:avLst/>
@@ -3842,8 +3842,8 @@
         </p:nvSpPr>
         <p:spPr>
           <a:xfrm>
-            <a:off x="2674620" y="3794760"/>
-            <a:ext cx="3154680" cy="365760"/>
+            <a:off x="3543300" y="3794760"/>
+            <a:ext cx="2286000" cy="365760"/>
           </a:xfrm>
           <a:prstGeom prst="rect">
             <a:avLst/>
@@ -3881,8 +3881,8 @@
         </p:nvSpPr>
         <p:spPr>
           <a:xfrm>
-            <a:off x="2674620" y="4160520"/>
-            <a:ext cx="3154680" cy="365760"/>
+            <a:off x="3543300" y="4160520"/>
+            <a:ext cx="2286000" cy="365760"/>
           </a:xfrm>
           <a:prstGeom prst="rect">
             <a:avLst/>
@@ -3921,7 +3921,7 @@
         <p:spPr>
           <a:xfrm>
             <a:off x="6149340" y="3657600"/>
-            <a:ext cx="3520440" cy="914400"/>
+            <a:ext cx="2651760" cy="914400"/>
           </a:xfrm>
           <a:prstGeom prst="rect">
             <a:avLst/>
@@ -3946,7 +3946,7 @@
         <p:spPr>
           <a:xfrm>
             <a:off x="6332220" y="3794760"/>
-            <a:ext cx="3154680" cy="365760"/>
+            <a:ext cx="2286000" cy="365760"/>
           </a:xfrm>
           <a:prstGeom prst="rect">
             <a:avLst/>
@@ -3985,7 +3985,7 @@
         <p:spPr>
           <a:xfrm>
             <a:off x="6332220" y="4160520"/>
-            <a:ext cx="3154680" cy="365760"/>
+            <a:ext cx="2286000" cy="365760"/>
           </a:xfrm>
           <a:prstGeom prst="rect">
             <a:avLst/>
@@ -4023,8 +4023,8 @@
         </p:nvSpPr>
         <p:spPr>
           <a:xfrm>
-            <a:off x="9806940" y="3657600"/>
-            <a:ext cx="3520440" cy="914400"/>
+            <a:off x="8938260" y="3657600"/>
+            <a:ext cx="2651760" cy="914400"/>
           </a:xfrm>
           <a:prstGeom prst="rect">
             <a:avLst/>
@@ -4048,8 +4048,8 @@
         </p:nvSpPr>
         <p:spPr>
           <a:xfrm>
-            <a:off x="9989820" y="3794760"/>
-            <a:ext cx="3154680" cy="365760"/>
+            <a:off x="9121140" y="3794760"/>
+            <a:ext cx="2286000" cy="365760"/>
           </a:xfrm>
           <a:prstGeom prst="rect">
             <a:avLst/>
@@ -4087,8 +4087,8 @@
         </p:nvSpPr>
         <p:spPr>
           <a:xfrm>
-            <a:off x="9989820" y="4160520"/>
-            <a:ext cx="3154680" cy="365760"/>
+            <a:off x="9121140" y="4160520"/>
+            <a:ext cx="2286000" cy="365760"/>
           </a:xfrm>
           <a:prstGeom prst="rect">
             <a:avLst/>
@@ -4126,8 +4126,8 @@
         </p:nvSpPr>
         <p:spPr>
           <a:xfrm>
-            <a:off x="-1165860" y="4709160"/>
-            <a:ext cx="3520440" cy="914400"/>
+            <a:off x="571500" y="4709160"/>
+            <a:ext cx="2651760" cy="914400"/>
           </a:xfrm>
           <a:prstGeom prst="rect">
             <a:avLst/>
@@ -4151,8 +4151,8 @@
         </p:nvSpPr>
         <p:spPr>
           <a:xfrm>
-            <a:off x="-982980" y="4846320"/>
-            <a:ext cx="3154680" cy="365760"/>
+            <a:off x="754380" y="4846320"/>
+            <a:ext cx="2286000" cy="365760"/>
           </a:xfrm>
           <a:prstGeom prst="rect">
             <a:avLst/>
@@ -4190,8 +4190,8 @@
         </p:nvSpPr>
         <p:spPr>
           <a:xfrm>
-            <a:off x="-982980" y="5212080"/>
-            <a:ext cx="3154680" cy="365760"/>
+            <a:off x="754380" y="5212080"/>
+            <a:ext cx="2286000" cy="365760"/>
           </a:xfrm>
           <a:prstGeom prst="rect">
             <a:avLst/>
@@ -4229,8 +4229,8 @@
         </p:nvSpPr>
         <p:spPr>
           <a:xfrm>
-            <a:off x="2491740" y="4709160"/>
-            <a:ext cx="3520440" cy="914400"/>
+            <a:off x="3360420" y="4709160"/>
+            <a:ext cx="2651760" cy="914400"/>
           </a:xfrm>
           <a:prstGeom prst="rect">
             <a:avLst/>
@@ -4254,8 +4254,8 @@
         </p:nvSpPr>
         <p:spPr>
           <a:xfrm>
-            <a:off x="2674620" y="4846320"/>
-            <a:ext cx="3154680" cy="365760"/>
+            <a:off x="3543300" y="4846320"/>
+            <a:ext cx="2286000" cy="365760"/>
           </a:xfrm>
           <a:prstGeom prst="rect">
             <a:avLst/>
@@ -4293,8 +4293,8 @@
         </p:nvSpPr>
         <p:spPr>
           <a:xfrm>
-            <a:off x="2674620" y="5212080"/>
-            <a:ext cx="3154680" cy="365760"/>
+            <a:off x="3543300" y="5212080"/>
+            <a:ext cx="2286000" cy="365760"/>
           </a:xfrm>
           <a:prstGeom prst="rect">
             <a:avLst/>
@@ -4333,7 +4333,7 @@
         <p:spPr>
           <a:xfrm>
             <a:off x="6149340" y="4709160"/>
-            <a:ext cx="3520440" cy="914400"/>
+            <a:ext cx="2651760" cy="914400"/>
           </a:xfrm>
           <a:prstGeom prst="rect">
             <a:avLst/>
@@ -4358,7 +4358,7 @@
         <p:spPr>
           <a:xfrm>
             <a:off x="6332220" y="4846320"/>
-            <a:ext cx="3154680" cy="365760"/>
+            <a:ext cx="2286000" cy="365760"/>
           </a:xfrm>
           <a:prstGeom prst="rect">
             <a:avLst/>
@@ -4397,7 +4397,7 @@
         <p:spPr>
           <a:xfrm>
             <a:off x="6332220" y="5212080"/>
-            <a:ext cx="3154680" cy="365760"/>
+            <a:ext cx="2286000" cy="365760"/>
           </a:xfrm>
           <a:prstGeom prst="rect">
             <a:avLst/>
@@ -4435,8 +4435,8 @@
         </p:nvSpPr>
         <p:spPr>
           <a:xfrm>
-            <a:off x="9806940" y="4709160"/>
-            <a:ext cx="3520440" cy="914400"/>
+            <a:off x="8938260" y="4709160"/>
+            <a:ext cx="2651760" cy="914400"/>
           </a:xfrm>
           <a:prstGeom prst="rect">
             <a:avLst/>
@@ -4460,8 +4460,8 @@
         </p:nvSpPr>
         <p:spPr>
           <a:xfrm>
-            <a:off x="9989820" y="4846320"/>
-            <a:ext cx="3154680" cy="365760"/>
+            <a:off x="9121140" y="4846320"/>
+            <a:ext cx="2286000" cy="365760"/>
           </a:xfrm>
           <a:prstGeom prst="rect">
             <a:avLst/>
@@ -4499,8 +4499,8 @@
         </p:nvSpPr>
         <p:spPr>
           <a:xfrm>
-            <a:off x="9989820" y="5212080"/>
-            <a:ext cx="3154680" cy="365760"/>
+            <a:off x="9121140" y="5212080"/>
+            <a:ext cx="2286000" cy="365760"/>
           </a:xfrm>
           <a:prstGeom prst="rect">
             <a:avLst/>
@@ -9064,8 +9064,8 @@
         </p:nvSpPr>
         <p:spPr>
           <a:xfrm>
-            <a:off x="640080" y="3657600"/>
-            <a:ext cx="6035040" cy="2651760"/>
+            <a:off x="640080" y="3520440"/>
+            <a:ext cx="6035040" cy="3246120"/>
           </a:xfrm>
           <a:prstGeom prst="rect">
             <a:avLst/>
@@ -9089,8 +9089,8 @@
         </p:nvSpPr>
         <p:spPr>
           <a:xfrm>
-            <a:off x="868680" y="3886200"/>
-            <a:ext cx="5577840" cy="2194560"/>
+            <a:off x="868680" y="3749040"/>
+            <a:ext cx="5577840" cy="2788920"/>
           </a:xfrm>
           <a:prstGeom prst="rect">
             <a:avLst/>
@@ -9106,7 +9106,7 @@
               <a:buNone/>
             </a:pPr>
             <a:r>
-              <a:rPr lang="en-US" sz="1200" dirty="0">
+              <a:rPr lang="en-US" sz="1100" dirty="0">
                 <a:solidFill>
                   <a:srgbClr val="1A1A1A"/>
                 </a:solidFill>
@@ -9121,7 +9121,7 @@
               <a:buNone/>
             </a:pPr>
             <a:r>
-              <a:rPr lang="en-US" sz="1200" dirty="0">
+              <a:rPr lang="en-US" sz="1100" dirty="0">
                 <a:solidFill>
                   <a:srgbClr val="C53030"/>
                 </a:solidFill>
@@ -9135,7 +9135,7 @@
               <a:buNone/>
             </a:pPr>
             <a:r>
-              <a:rPr lang="en-US" sz="1200" dirty="0">
+              <a:rPr lang="en-US" sz="1100" dirty="0">
                 <a:solidFill>
                   <a:srgbClr val="276749"/>
                 </a:solidFill>
@@ -9150,7 +9150,7 @@
               <a:buNone/>
             </a:pPr>
             <a:r>
-              <a:rPr lang="en-US" sz="1200" dirty="0">
+              <a:rPr lang="en-US" sz="1100" dirty="0">
                 <a:solidFill>
                   <a:srgbClr val="C53030"/>
                 </a:solidFill>
@@ -9164,7 +9164,7 @@
               <a:buNone/>
             </a:pPr>
             <a:r>
-              <a:rPr lang="en-US" sz="1200" dirty="0">
+              <a:rPr lang="en-US" sz="1100" dirty="0">
                 <a:solidFill>
                   <a:srgbClr val="276749"/>
                 </a:solidFill>
@@ -9179,7 +9179,7 @@
               <a:buNone/>
             </a:pPr>
             <a:r>
-              <a:rPr lang="en-US" sz="1200" dirty="0">
+              <a:rPr lang="en-US" sz="1100" dirty="0">
                 <a:solidFill>
                   <a:srgbClr val="C53030"/>
                 </a:solidFill>
@@ -9193,7 +9193,7 @@
               <a:buNone/>
             </a:pPr>
             <a:r>
-              <a:rPr lang="en-US" sz="1200" dirty="0">
+              <a:rPr lang="en-US" sz="1100" dirty="0">
                 <a:solidFill>
                   <a:srgbClr val="276749"/>
                 </a:solidFill>
@@ -9208,7 +9208,7 @@
               <a:buNone/>
             </a:pPr>
             <a:r>
-              <a:rPr lang="en-US" sz="1200" dirty="0">
+              <a:rPr lang="en-US" sz="1100" dirty="0">
                 <a:solidFill>
                   <a:srgbClr val="C53030"/>
                 </a:solidFill>
@@ -9222,7 +9222,7 @@
               <a:buNone/>
             </a:pPr>
             <a:r>
-              <a:rPr lang="en-US" sz="1200" dirty="0">
+              <a:rPr lang="en-US" sz="1100" dirty="0">
                 <a:solidFill>
                   <a:srgbClr val="276749"/>
                 </a:solidFill>
@@ -9237,7 +9237,7 @@
               <a:buNone/>
             </a:pPr>
             <a:r>
-              <a:rPr lang="en-US" sz="1200" dirty="0">
+              <a:rPr lang="en-US" sz="1100" dirty="0">
                 <a:solidFill>
                   <a:srgbClr val="C53030"/>
                 </a:solidFill>
@@ -9251,7 +9251,7 @@
               <a:buNone/>
             </a:pPr>
             <a:r>
-              <a:rPr lang="en-US" sz="1200" dirty="0">
+              <a:rPr lang="en-US" sz="1100" dirty="0">
                 <a:solidFill>
                   <a:srgbClr val="276749"/>
                 </a:solidFill>
@@ -9266,7 +9266,7 @@
               <a:buNone/>
             </a:pPr>
             <a:r>
-              <a:rPr lang="en-US" sz="1200" dirty="0">
+              <a:rPr lang="en-US" sz="1100" dirty="0">
                 <a:solidFill>
                   <a:srgbClr val="C53030"/>
                 </a:solidFill>
@@ -9280,7 +9280,7 @@
               <a:buNone/>
             </a:pPr>
             <a:r>
-              <a:rPr lang="en-US" sz="1200" dirty="0">
+              <a:rPr lang="en-US" sz="1100" dirty="0">
                 <a:solidFill>
                   <a:srgbClr val="276749"/>
                 </a:solidFill>
@@ -9295,7 +9295,7 @@
               <a:buNone/>
             </a:pPr>
             <a:r>
-              <a:rPr lang="en-US" sz="1200" dirty="0">
+              <a:rPr lang="en-US" sz="1100" dirty="0">
                 <a:solidFill>
                   <a:srgbClr val="C53030"/>
                 </a:solidFill>
@@ -9309,7 +9309,7 @@
               <a:buNone/>
             </a:pPr>
             <a:r>
-              <a:rPr lang="en-US" sz="1200" dirty="0">
+              <a:rPr lang="en-US" sz="1100" dirty="0">
                 <a:solidFill>
                   <a:srgbClr val="276749"/>
                 </a:solidFill>
@@ -9324,7 +9324,7 @@
               <a:buNone/>
             </a:pPr>
             <a:r>
-              <a:rPr lang="en-US" sz="1200" dirty="0">
+              <a:rPr lang="en-US" sz="1100" dirty="0">
                 <a:solidFill>
                   <a:srgbClr val="1A1A1A"/>
                 </a:solidFill>
@@ -9339,7 +9339,7 @@
               <a:buNone/>
             </a:pPr>
             <a:r>
-              <a:rPr lang="en-US" sz="1200" dirty="0">
+              <a:rPr lang="en-US" sz="1100" dirty="0">
                 <a:solidFill>
                   <a:srgbClr val="C53030"/>
                 </a:solidFill>
@@ -9353,7 +9353,7 @@
               <a:buNone/>
             </a:pPr>
             <a:r>
-              <a:rPr lang="en-US" sz="1200" dirty="0">
+              <a:rPr lang="en-US" sz="1100" dirty="0">
                 <a:solidFill>
                   <a:srgbClr val="276749"/>
                 </a:solidFill>
@@ -9367,7 +9367,7 @@
               <a:buNone/>
             </a:pPr>
             <a:r>
-              <a:rPr lang="en-US" sz="1200" dirty="0">
+              <a:rPr lang="en-US" sz="1100" dirty="0">
                 <a:solidFill>
                   <a:srgbClr val="6E7681"/>
                 </a:solidFill>
@@ -9382,7 +9382,7 @@
               <a:buNone/>
             </a:pPr>
             <a:r>
-              <a:rPr lang="en-US" sz="1200" dirty="0">
+              <a:rPr lang="en-US" sz="1100" dirty="0">
                 <a:solidFill>
                   <a:srgbClr val="C53030"/>
                 </a:solidFill>
@@ -9396,7 +9396,7 @@
               <a:buNone/>
             </a:pPr>
             <a:r>
-              <a:rPr lang="en-US" sz="1200" dirty="0">
+              <a:rPr lang="en-US" sz="1100" dirty="0">
                 <a:solidFill>
                   <a:srgbClr val="276749"/>
                 </a:solidFill>
@@ -9410,7 +9410,7 @@
               <a:buNone/>
             </a:pPr>
             <a:r>
-              <a:rPr lang="en-US" sz="1200" dirty="0">
+              <a:rPr lang="en-US" sz="1100" dirty="0">
                 <a:solidFill>
                   <a:srgbClr val="6E7681"/>
                 </a:solidFill>
@@ -9425,7 +9425,7 @@
               <a:buNone/>
             </a:pPr>
             <a:r>
-              <a:rPr lang="en-US" sz="1200" dirty="0">
+              <a:rPr lang="en-US" sz="1100" dirty="0">
                 <a:solidFill>
                   <a:srgbClr val="C53030"/>
                 </a:solidFill>
@@ -9439,7 +9439,7 @@
               <a:buNone/>
             </a:pPr>
             <a:r>
-              <a:rPr lang="en-US" sz="1200" dirty="0">
+              <a:rPr lang="en-US" sz="1100" dirty="0">
                 <a:solidFill>
                   <a:srgbClr val="276749"/>
                 </a:solidFill>
@@ -9453,7 +9453,7 @@
               <a:buNone/>
             </a:pPr>
             <a:r>
-              <a:rPr lang="en-US" sz="1200" dirty="0">
+              <a:rPr lang="en-US" sz="1100" dirty="0">
                 <a:solidFill>
                   <a:srgbClr val="6E7681"/>
                 </a:solidFill>
@@ -9468,7 +9468,7 @@
               <a:buNone/>
             </a:pPr>
             <a:r>
-              <a:rPr lang="en-US" sz="1200" dirty="0">
+              <a:rPr lang="en-US" sz="1100" dirty="0">
                 <a:solidFill>
                   <a:srgbClr val="C53030"/>
                 </a:solidFill>
@@ -9482,7 +9482,7 @@
               <a:buNone/>
             </a:pPr>
             <a:r>
-              <a:rPr lang="en-US" sz="1200" dirty="0">
+              <a:rPr lang="en-US" sz="1100" dirty="0">
                 <a:solidFill>
                   <a:srgbClr val="276749"/>
                 </a:solidFill>
@@ -9496,7 +9496,7 @@
               <a:buNone/>
             </a:pPr>
             <a:r>
-              <a:rPr lang="en-US" sz="1200" dirty="0">
+              <a:rPr lang="en-US" sz="1100" dirty="0">
                 <a:solidFill>
                   <a:srgbClr val="6E7681"/>
                 </a:solidFill>
@@ -9511,7 +9511,7 @@
               <a:buNone/>
             </a:pPr>
             <a:r>
-              <a:rPr lang="en-US" sz="1200" dirty="0">
+              <a:rPr lang="en-US" sz="1100" dirty="0">
                 <a:solidFill>
                   <a:srgbClr val="1A1A1A"/>
                 </a:solidFill>
@@ -9523,7 +9523,7 @@
 }
 </a:t>
             </a:r>
-            <a:endParaRPr lang="en-US" sz="1200" dirty="0"/>
+            <a:endParaRPr lang="en-US" sz="1100" dirty="0"/>
           </a:p>
         </p:txBody>
       </p:sp>
@@ -9535,7 +9535,7 @@
         </p:nvSpPr>
         <p:spPr>
           <a:xfrm>
-            <a:off x="7406640" y="3657600"/>
+            <a:off x="7406640" y="3520440"/>
             <a:ext cx="4114800" cy="365760"/>
           </a:xfrm>
           <a:prstGeom prst="rect">
@@ -9574,8 +9574,8 @@
         </p:nvSpPr>
         <p:spPr>
           <a:xfrm>
-            <a:off x="7406640" y="4114800"/>
-            <a:ext cx="4114800" cy="2377440"/>
+            <a:off x="7406640" y="3977640"/>
+            <a:ext cx="4114800" cy="2743200"/>
           </a:xfrm>
           <a:prstGeom prst="rect">
             <a:avLst/>

--- a/docs/showcase/deliverables/kars-pitch-deck.pptx
+++ b/docs/showcase/deliverables/kars-pitch-deck.pptx
@@ -28,9 +28,12 @@
     <p:sldId id="276" r:id="rId22"/>
     <p:sldId id="277" r:id="rId23"/>
     <p:sldId id="278" r:id="rId24"/>
+    <p:sldId id="279" r:id="rId25"/>
+    <p:sldId id="280" r:id="rId26"/>
+    <p:sldId id="281" r:id="rId27"/>
   </p:sldIdLst>
   <p:notesMasterIdLst>
-    <p:notesMasterId r:id="rId25"/>
+    <p:notesMasterId r:id="rId28"/>
   </p:notesMasterIdLst>
   <p:sldSz cx="12192000" cy="6858000"/>
   <p:notesSz cx="6858000" cy="12192000"/>
@@ -1868,6 +1871,270 @@
             <a:fld id="{F7021451-1387-4CA6-816F-3879F97B5CBC}" type="slidenum">
               <a:rPr lang="en-US"/>
               <a:t>23</a:t>
+            </a:fld>
+            <a:endParaRPr lang="en-US"/>
+          </a:p>
+        </p:txBody>
+      </p:sp>
+    </p:spTree>
+    <p:extLst>
+      <p:ext uri="{BB962C8B-B14F-4D97-AF65-F5344CB8AC3E}">
+        <p14:creationId xmlns:p14="http://schemas.microsoft.com/office/powerpoint/2010/main" val="1024086991"/>
+      </p:ext>
+    </p:extLst>
+  </p:cSld>
+  <p:clrMapOvr>
+    <a:masterClrMapping/>
+  </p:clrMapOvr>
+</p:notes>
+</file>
+
+<file path=ppt/notesSlides/notesSlide24.xml><?xml version="1.0" encoding="utf-8"?>
+<p:notes xmlns:a="http://schemas.openxmlformats.org/drawingml/2006/main" xmlns:r="http://schemas.openxmlformats.org/officeDocument/2006/relationships" xmlns:p="http://schemas.openxmlformats.org/presentationml/2006/main">
+  <p:cSld>
+    <p:spTree>
+      <p:nvGrpSpPr>
+        <p:cNvPr id="1" name=""/>
+        <p:cNvGrpSpPr/>
+        <p:nvPr/>
+      </p:nvGrpSpPr>
+      <p:grpSpPr>
+        <a:xfrm>
+          <a:off x="0" y="0"/>
+          <a:ext cx="0" cy="0"/>
+          <a:chOff x="0" y="0"/>
+          <a:chExt cx="0" cy="0"/>
+        </a:xfrm>
+      </p:grpSpPr>
+      <p:sp>
+        <p:nvSpPr>
+          <p:cNvPr id="2" name="Slide Image Placeholder 1"/>
+          <p:cNvSpPr>
+            <a:spLocks noGrp="1" noRot="1" noChangeAspect="1"/>
+          </p:cNvSpPr>
+          <p:nvPr>
+            <p:ph type="sldImg"/>
+          </p:nvPr>
+        </p:nvSpPr>
+        <p:spPr/>
+      </p:sp>
+      <p:sp>
+        <p:nvSpPr>
+          <p:cNvPr id="3" name="Notes Placeholder 2"/>
+          <p:cNvSpPr>
+            <a:spLocks noGrp="1"/>
+          </p:cNvSpPr>
+          <p:nvPr>
+            <p:ph type="body" idx="1"/>
+          </p:nvPr>
+        </p:nvSpPr>
+        <p:spPr/>
+        <p:txBody>
+          <a:bodyPr/>
+          <a:lstStyle/>
+          <a:p>
+            <a:r>
+              <a:rPr lang="en-US" dirty="0"/>
+              <a:t/>
+            </a:r>
+            <a:endParaRPr lang="en-US" dirty="0"/>
+          </a:p>
+        </p:txBody>
+      </p:sp>
+      <p:sp>
+        <p:nvSpPr>
+          <p:cNvPr id="4" name="Slide Number Placeholder 3"/>
+          <p:cNvSpPr>
+            <a:spLocks noGrp="1"/>
+          </p:cNvSpPr>
+          <p:nvPr>
+            <p:ph type="sldNum" sz="quarter" idx="10"/>
+          </p:nvPr>
+        </p:nvSpPr>
+        <p:spPr/>
+        <p:txBody>
+          <a:bodyPr/>
+          <a:lstStyle/>
+          <a:p>
+            <a:fld id="{F7021451-1387-4CA6-816F-3879F97B5CBC}" type="slidenum">
+              <a:rPr lang="en-US"/>
+              <a:t>24</a:t>
+            </a:fld>
+            <a:endParaRPr lang="en-US"/>
+          </a:p>
+        </p:txBody>
+      </p:sp>
+    </p:spTree>
+    <p:extLst>
+      <p:ext uri="{BB962C8B-B14F-4D97-AF65-F5344CB8AC3E}">
+        <p14:creationId xmlns:p14="http://schemas.microsoft.com/office/powerpoint/2010/main" val="1024086991"/>
+      </p:ext>
+    </p:extLst>
+  </p:cSld>
+  <p:clrMapOvr>
+    <a:masterClrMapping/>
+  </p:clrMapOvr>
+</p:notes>
+</file>
+
+<file path=ppt/notesSlides/notesSlide25.xml><?xml version="1.0" encoding="utf-8"?>
+<p:notes xmlns:a="http://schemas.openxmlformats.org/drawingml/2006/main" xmlns:r="http://schemas.openxmlformats.org/officeDocument/2006/relationships" xmlns:p="http://schemas.openxmlformats.org/presentationml/2006/main">
+  <p:cSld>
+    <p:spTree>
+      <p:nvGrpSpPr>
+        <p:cNvPr id="1" name=""/>
+        <p:cNvGrpSpPr/>
+        <p:nvPr/>
+      </p:nvGrpSpPr>
+      <p:grpSpPr>
+        <a:xfrm>
+          <a:off x="0" y="0"/>
+          <a:ext cx="0" cy="0"/>
+          <a:chOff x="0" y="0"/>
+          <a:chExt cx="0" cy="0"/>
+        </a:xfrm>
+      </p:grpSpPr>
+      <p:sp>
+        <p:nvSpPr>
+          <p:cNvPr id="2" name="Slide Image Placeholder 1"/>
+          <p:cNvSpPr>
+            <a:spLocks noGrp="1" noRot="1" noChangeAspect="1"/>
+          </p:cNvSpPr>
+          <p:nvPr>
+            <p:ph type="sldImg"/>
+          </p:nvPr>
+        </p:nvSpPr>
+        <p:spPr/>
+      </p:sp>
+      <p:sp>
+        <p:nvSpPr>
+          <p:cNvPr id="3" name="Notes Placeholder 2"/>
+          <p:cNvSpPr>
+            <a:spLocks noGrp="1"/>
+          </p:cNvSpPr>
+          <p:nvPr>
+            <p:ph type="body" idx="1"/>
+          </p:nvPr>
+        </p:nvSpPr>
+        <p:spPr/>
+        <p:txBody>
+          <a:bodyPr/>
+          <a:lstStyle/>
+          <a:p>
+            <a:r>
+              <a:rPr lang="en-US" dirty="0"/>
+              <a:t/>
+            </a:r>
+            <a:endParaRPr lang="en-US" dirty="0"/>
+          </a:p>
+        </p:txBody>
+      </p:sp>
+      <p:sp>
+        <p:nvSpPr>
+          <p:cNvPr id="4" name="Slide Number Placeholder 3"/>
+          <p:cNvSpPr>
+            <a:spLocks noGrp="1"/>
+          </p:cNvSpPr>
+          <p:nvPr>
+            <p:ph type="sldNum" sz="quarter" idx="10"/>
+          </p:nvPr>
+        </p:nvSpPr>
+        <p:spPr/>
+        <p:txBody>
+          <a:bodyPr/>
+          <a:lstStyle/>
+          <a:p>
+            <a:fld id="{F7021451-1387-4CA6-816F-3879F97B5CBC}" type="slidenum">
+              <a:rPr lang="en-US"/>
+              <a:t>25</a:t>
+            </a:fld>
+            <a:endParaRPr lang="en-US"/>
+          </a:p>
+        </p:txBody>
+      </p:sp>
+    </p:spTree>
+    <p:extLst>
+      <p:ext uri="{BB962C8B-B14F-4D97-AF65-F5344CB8AC3E}">
+        <p14:creationId xmlns:p14="http://schemas.microsoft.com/office/powerpoint/2010/main" val="1024086991"/>
+      </p:ext>
+    </p:extLst>
+  </p:cSld>
+  <p:clrMapOvr>
+    <a:masterClrMapping/>
+  </p:clrMapOvr>
+</p:notes>
+</file>
+
+<file path=ppt/notesSlides/notesSlide26.xml><?xml version="1.0" encoding="utf-8"?>
+<p:notes xmlns:a="http://schemas.openxmlformats.org/drawingml/2006/main" xmlns:r="http://schemas.openxmlformats.org/officeDocument/2006/relationships" xmlns:p="http://schemas.openxmlformats.org/presentationml/2006/main">
+  <p:cSld>
+    <p:spTree>
+      <p:nvGrpSpPr>
+        <p:cNvPr id="1" name=""/>
+        <p:cNvGrpSpPr/>
+        <p:nvPr/>
+      </p:nvGrpSpPr>
+      <p:grpSpPr>
+        <a:xfrm>
+          <a:off x="0" y="0"/>
+          <a:ext cx="0" cy="0"/>
+          <a:chOff x="0" y="0"/>
+          <a:chExt cx="0" cy="0"/>
+        </a:xfrm>
+      </p:grpSpPr>
+      <p:sp>
+        <p:nvSpPr>
+          <p:cNvPr id="2" name="Slide Image Placeholder 1"/>
+          <p:cNvSpPr>
+            <a:spLocks noGrp="1" noRot="1" noChangeAspect="1"/>
+          </p:cNvSpPr>
+          <p:nvPr>
+            <p:ph type="sldImg"/>
+          </p:nvPr>
+        </p:nvSpPr>
+        <p:spPr/>
+      </p:sp>
+      <p:sp>
+        <p:nvSpPr>
+          <p:cNvPr id="3" name="Notes Placeholder 2"/>
+          <p:cNvSpPr>
+            <a:spLocks noGrp="1"/>
+          </p:cNvSpPr>
+          <p:nvPr>
+            <p:ph type="body" idx="1"/>
+          </p:nvPr>
+        </p:nvSpPr>
+        <p:spPr/>
+        <p:txBody>
+          <a:bodyPr/>
+          <a:lstStyle/>
+          <a:p>
+            <a:r>
+              <a:rPr lang="en-US" dirty="0"/>
+              <a:t/>
+            </a:r>
+            <a:endParaRPr lang="en-US" dirty="0"/>
+          </a:p>
+        </p:txBody>
+      </p:sp>
+      <p:sp>
+        <p:nvSpPr>
+          <p:cNvPr id="4" name="Slide Number Placeholder 3"/>
+          <p:cNvSpPr>
+            <a:spLocks noGrp="1"/>
+          </p:cNvSpPr>
+          <p:nvPr>
+            <p:ph type="sldNum" sz="quarter" idx="10"/>
+          </p:nvPr>
+        </p:nvSpPr>
+        <p:spPr/>
+        <p:txBody>
+          <a:bodyPr/>
+          <a:lstStyle/>
+          <a:p>
+            <a:fld id="{F7021451-1387-4CA6-816F-3879F97B5CBC}" type="slidenum">
+              <a:rPr lang="en-US"/>
+              <a:t>26</a:t>
             </a:fld>
             <a:endParaRPr lang="en-US"/>
           </a:p>
@@ -15155,6 +15422,1933 @@
     <p:bg>
       <p:bgPr>
         <a:solidFill>
+          <a:srgbClr val="FFFFFF"/>
+        </a:solidFill>
+      </p:bgPr>
+    </p:bg>
+    <p:spTree>
+      <p:nvGrpSpPr>
+        <p:cNvPr id="1" name=""/>
+        <p:cNvGrpSpPr/>
+        <p:nvPr/>
+      </p:nvGrpSpPr>
+      <p:grpSpPr>
+        <a:xfrm>
+          <a:off x="0" y="0"/>
+          <a:ext cx="0" cy="0"/>
+          <a:chOff x="0" y="0"/>
+          <a:chExt cx="0" cy="0"/>
+        </a:xfrm>
+      </p:grpSpPr>
+      <p:sp>
+        <p:nvSpPr>
+          <p:cNvPr id="2" name="Text 0"/>
+          <p:cNvSpPr/>
+          <p:nvPr/>
+        </p:nvSpPr>
+        <p:spPr>
+          <a:xfrm>
+            <a:off x="11155680" y="6400800"/>
+            <a:ext cx="365760" cy="274320"/>
+          </a:xfrm>
+          <a:prstGeom prst="rect">
+            <a:avLst/>
+          </a:prstGeom>
+          <a:noFill/>
+          <a:ln/>
+        </p:spPr>
+        <p:txBody>
+          <a:bodyPr wrap="square" lIns="0" tIns="0" rIns="0" bIns="0" rtlCol="0" anchor="ctr"/>
+          <a:lstStyle/>
+          <a:p>
+            <a:pPr algn="r" indent="0" marL="0">
+              <a:buNone/>
+            </a:pPr>
+            <a:r>
+              <a:rPr lang="en-US" sz="1000" dirty="0">
+                <a:solidFill>
+                  <a:srgbClr val="AFB3BD"/>
+                </a:solidFill>
+                <a:latin typeface="Helvetica" pitchFamily="34" charset="0"/>
+                <a:ea typeface="Helvetica" pitchFamily="34" charset="-122"/>
+                <a:cs typeface="Helvetica" pitchFamily="34" charset="-120"/>
+              </a:rPr>
+              <a:t>23</a:t>
+            </a:r>
+            <a:endParaRPr lang="en-US" sz="1000" dirty="0"/>
+          </a:p>
+        </p:txBody>
+      </p:sp>
+      <p:sp>
+        <p:nvSpPr>
+          <p:cNvPr id="3" name="Text 1"/>
+          <p:cNvSpPr/>
+          <p:nvPr/>
+        </p:nvSpPr>
+        <p:spPr>
+          <a:xfrm>
+            <a:off x="640080" y="502920"/>
+            <a:ext cx="10881360" cy="274320"/>
+          </a:xfrm>
+          <a:prstGeom prst="rect">
+            <a:avLst/>
+          </a:prstGeom>
+          <a:noFill/>
+          <a:ln/>
+        </p:spPr>
+        <p:txBody>
+          <a:bodyPr wrap="square" lIns="0" tIns="0" rIns="0" bIns="0" rtlCol="0" anchor="ctr"/>
+          <a:lstStyle/>
+          <a:p>
+            <a:pPr indent="0" marL="0">
+              <a:buNone/>
+            </a:pPr>
+            <a:r>
+              <a:rPr lang="en-US" sz="1100" spc="400" kern="0" dirty="0">
+                <a:solidFill>
+                  <a:srgbClr val="6E7681"/>
+                </a:solidFill>
+                <a:latin typeface="Helvetica" pitchFamily="34" charset="0"/>
+                <a:ea typeface="Helvetica" pitchFamily="34" charset="-122"/>
+                <a:cs typeface="Helvetica" pitchFamily="34" charset="-120"/>
+              </a:rPr>
+              <a:t>§12 · LIVE DEMO · ACT I</a:t>
+            </a:r>
+            <a:endParaRPr lang="en-US" sz="1100" dirty="0"/>
+          </a:p>
+        </p:txBody>
+      </p:sp>
+      <p:sp>
+        <p:nvSpPr>
+          <p:cNvPr id="4" name="Text 2"/>
+          <p:cNvSpPr/>
+          <p:nvPr/>
+        </p:nvSpPr>
+        <p:spPr>
+          <a:xfrm>
+            <a:off x="640080" y="914400"/>
+            <a:ext cx="10881360" cy="1280160"/>
+          </a:xfrm>
+          <a:prstGeom prst="rect">
+            <a:avLst/>
+          </a:prstGeom>
+          <a:noFill/>
+          <a:ln/>
+        </p:spPr>
+        <p:txBody>
+          <a:bodyPr wrap="square" lIns="0" tIns="0" rIns="0" bIns="0" rtlCol="0" anchor="t"/>
+          <a:lstStyle/>
+          <a:p>
+            <a:pPr algn="l" indent="0" marL="0">
+              <a:buNone/>
+            </a:pPr>
+            <a:r>
+              <a:rPr lang="en-US" sz="3800" b="1" dirty="0">
+                <a:solidFill>
+                  <a:srgbClr val="1A1A1A"/>
+                </a:solidFill>
+                <a:latin typeface="Helvetica" pitchFamily="34" charset="0"/>
+                <a:ea typeface="Helvetica" pitchFamily="34" charset="-122"/>
+                <a:cs typeface="Helvetica" pitchFamily="34" charset="-120"/>
+              </a:rPr>
+              <a:t>Secure runtime, in motion.</a:t>
+            </a:r>
+            <a:endParaRPr lang="en-US" sz="3800" dirty="0"/>
+          </a:p>
+        </p:txBody>
+      </p:sp>
+      <p:sp>
+        <p:nvSpPr>
+          <p:cNvPr id="5" name="Text 3"/>
+          <p:cNvSpPr/>
+          <p:nvPr/>
+        </p:nvSpPr>
+        <p:spPr>
+          <a:xfrm>
+            <a:off x="640080" y="2286000"/>
+            <a:ext cx="10881360" cy="1188720"/>
+          </a:xfrm>
+          <a:prstGeom prst="rect">
+            <a:avLst/>
+          </a:prstGeom>
+          <a:noFill/>
+          <a:ln/>
+        </p:spPr>
+        <p:txBody>
+          <a:bodyPr wrap="square" lIns="0" tIns="0" rIns="0" bIns="0" rtlCol="0" anchor="t"/>
+          <a:lstStyle/>
+          <a:p>
+            <a:pPr algn="l" indent="0" marL="0">
+              <a:spcAft>
+                <a:spcPts val="800"/>
+              </a:spcAft>
+              <a:buNone/>
+            </a:pPr>
+            <a:r>
+              <a:rPr lang="en-US" sz="1800" dirty="0">
+                <a:solidFill>
+                  <a:srgbClr val="1A1A1A"/>
+                </a:solidFill>
+                <a:latin typeface="Helvetica" pitchFamily="34" charset="0"/>
+                <a:ea typeface="Helvetica" pitchFamily="34" charset="-122"/>
+                <a:cs typeface="Helvetica" pitchFamily="34" charset="-120"/>
+              </a:rPr>
+              <a:t>A normal agent on the cluster.  Watch a governed research-agent come up, answer a question, get its tool call approval-gated via Telegram, and land every step in the audit log.</a:t>
+            </a:r>
+            <a:endParaRPr lang="en-US" sz="1800" dirty="0"/>
+          </a:p>
+        </p:txBody>
+      </p:sp>
+      <p:sp>
+        <p:nvSpPr>
+          <p:cNvPr id="6" name="Text 4"/>
+          <p:cNvSpPr/>
+          <p:nvPr/>
+        </p:nvSpPr>
+        <p:spPr>
+          <a:xfrm>
+            <a:off x="640080" y="3611880"/>
+            <a:ext cx="411480" cy="548640"/>
+          </a:xfrm>
+          <a:prstGeom prst="rect">
+            <a:avLst/>
+          </a:prstGeom>
+          <a:noFill/>
+          <a:ln/>
+        </p:spPr>
+        <p:txBody>
+          <a:bodyPr wrap="square" lIns="0" tIns="0" rIns="0" bIns="0" rtlCol="0" anchor="t"/>
+          <a:lstStyle/>
+          <a:p>
+            <a:pPr indent="0" marL="0">
+              <a:buNone/>
+            </a:pPr>
+            <a:r>
+              <a:rPr lang="en-US" sz="1800" b="1" dirty="0">
+                <a:solidFill>
+                  <a:srgbClr val="028090"/>
+                </a:solidFill>
+                <a:latin typeface="Consolas" pitchFamily="34" charset="0"/>
+                <a:ea typeface="Consolas" pitchFamily="34" charset="-122"/>
+                <a:cs typeface="Consolas" pitchFamily="34" charset="-120"/>
+              </a:rPr>
+              <a:t>1</a:t>
+            </a:r>
+            <a:endParaRPr lang="en-US" sz="1800" dirty="0"/>
+          </a:p>
+        </p:txBody>
+      </p:sp>
+      <p:sp>
+        <p:nvSpPr>
+          <p:cNvPr id="7" name="Text 5"/>
+          <p:cNvSpPr/>
+          <p:nvPr/>
+        </p:nvSpPr>
+        <p:spPr>
+          <a:xfrm>
+            <a:off x="1143000" y="3611880"/>
+            <a:ext cx="4937760" cy="292608"/>
+          </a:xfrm>
+          <a:prstGeom prst="rect">
+            <a:avLst/>
+          </a:prstGeom>
+          <a:noFill/>
+          <a:ln/>
+        </p:spPr>
+        <p:txBody>
+          <a:bodyPr wrap="square" lIns="0" tIns="0" rIns="0" bIns="0" rtlCol="0" anchor="ctr"/>
+          <a:lstStyle/>
+          <a:p>
+            <a:pPr indent="0" marL="0">
+              <a:buNone/>
+            </a:pPr>
+            <a:r>
+              <a:rPr lang="en-US" sz="1200" dirty="0">
+                <a:solidFill>
+                  <a:srgbClr val="1A1A1A"/>
+                </a:solidFill>
+                <a:latin typeface="Consolas" pitchFamily="34" charset="0"/>
+                <a:ea typeface="Consolas" pitchFamily="34" charset="-122"/>
+                <a:cs typeface="Consolas" pitchFamily="34" charset="-120"/>
+              </a:rPr>
+              <a:t>kars dev</a:t>
+            </a:r>
+            <a:endParaRPr lang="en-US" sz="1200" dirty="0"/>
+          </a:p>
+        </p:txBody>
+      </p:sp>
+      <p:sp>
+        <p:nvSpPr>
+          <p:cNvPr id="8" name="Text 6"/>
+          <p:cNvSpPr/>
+          <p:nvPr/>
+        </p:nvSpPr>
+        <p:spPr>
+          <a:xfrm>
+            <a:off x="1143000" y="3886200"/>
+            <a:ext cx="10378440" cy="292608"/>
+          </a:xfrm>
+          <a:prstGeom prst="rect">
+            <a:avLst/>
+          </a:prstGeom>
+          <a:noFill/>
+          <a:ln/>
+        </p:spPr>
+        <p:txBody>
+          <a:bodyPr wrap="square" lIns="0" tIns="0" rIns="0" bIns="0" rtlCol="0" anchor="ctr"/>
+          <a:lstStyle/>
+          <a:p>
+            <a:pPr indent="0" marL="0">
+              <a:buNone/>
+            </a:pPr>
+            <a:r>
+              <a:rPr lang="en-US" sz="1100" dirty="0">
+                <a:solidFill>
+                  <a:srgbClr val="6E7681"/>
+                </a:solidFill>
+                <a:latin typeface="Helvetica" pitchFamily="34" charset="0"/>
+                <a:ea typeface="Helvetica" pitchFamily="34" charset="-122"/>
+                <a:cs typeface="Helvetica" pitchFamily="34" charset="-120"/>
+              </a:rPr>
+              <a:t>kind cluster up · controller / relay / registry installed · ready in ~60 s</a:t>
+            </a:r>
+            <a:endParaRPr lang="en-US" sz="1100" dirty="0"/>
+          </a:p>
+        </p:txBody>
+      </p:sp>
+      <p:sp>
+        <p:nvSpPr>
+          <p:cNvPr id="9" name="Shape 7"/>
+          <p:cNvSpPr/>
+          <p:nvPr/>
+        </p:nvSpPr>
+        <p:spPr>
+          <a:xfrm>
+            <a:off x="640080" y="4123944"/>
+            <a:ext cx="10881360" cy="0"/>
+          </a:xfrm>
+          <a:prstGeom prst="line">
+            <a:avLst/>
+          </a:prstGeom>
+          <a:noFill/>
+          <a:ln w="6350">
+            <a:solidFill>
+              <a:srgbClr val="E1E4E8"/>
+            </a:solidFill>
+            <a:prstDash val="solid"/>
+          </a:ln>
+        </p:spPr>
+      </p:sp>
+      <p:sp>
+        <p:nvSpPr>
+          <p:cNvPr id="10" name="Text 8"/>
+          <p:cNvSpPr/>
+          <p:nvPr/>
+        </p:nvSpPr>
+        <p:spPr>
+          <a:xfrm>
+            <a:off x="640080" y="4160520"/>
+            <a:ext cx="411480" cy="548640"/>
+          </a:xfrm>
+          <a:prstGeom prst="rect">
+            <a:avLst/>
+          </a:prstGeom>
+          <a:noFill/>
+          <a:ln/>
+        </p:spPr>
+        <p:txBody>
+          <a:bodyPr wrap="square" lIns="0" tIns="0" rIns="0" bIns="0" rtlCol="0" anchor="t"/>
+          <a:lstStyle/>
+          <a:p>
+            <a:pPr indent="0" marL="0">
+              <a:buNone/>
+            </a:pPr>
+            <a:r>
+              <a:rPr lang="en-US" sz="1800" b="1" dirty="0">
+                <a:solidFill>
+                  <a:srgbClr val="028090"/>
+                </a:solidFill>
+                <a:latin typeface="Consolas" pitchFamily="34" charset="0"/>
+                <a:ea typeface="Consolas" pitchFamily="34" charset="-122"/>
+                <a:cs typeface="Consolas" pitchFamily="34" charset="-120"/>
+              </a:rPr>
+              <a:t>2</a:t>
+            </a:r>
+            <a:endParaRPr lang="en-US" sz="1800" dirty="0"/>
+          </a:p>
+        </p:txBody>
+      </p:sp>
+      <p:sp>
+        <p:nvSpPr>
+          <p:cNvPr id="11" name="Text 9"/>
+          <p:cNvSpPr/>
+          <p:nvPr/>
+        </p:nvSpPr>
+        <p:spPr>
+          <a:xfrm>
+            <a:off x="1143000" y="4160520"/>
+            <a:ext cx="4937760" cy="292608"/>
+          </a:xfrm>
+          <a:prstGeom prst="rect">
+            <a:avLst/>
+          </a:prstGeom>
+          <a:noFill/>
+          <a:ln/>
+        </p:spPr>
+        <p:txBody>
+          <a:bodyPr wrap="square" lIns="0" tIns="0" rIns="0" bIns="0" rtlCol="0" anchor="ctr"/>
+          <a:lstStyle/>
+          <a:p>
+            <a:pPr indent="0" marL="0">
+              <a:buNone/>
+            </a:pPr>
+            <a:r>
+              <a:rPr lang="en-US" sz="1200" dirty="0">
+                <a:solidFill>
+                  <a:srgbClr val="1A1A1A"/>
+                </a:solidFill>
+                <a:latin typeface="Consolas" pitchFamily="34" charset="0"/>
+                <a:ea typeface="Consolas" pitchFamily="34" charset="-122"/>
+                <a:cs typeface="Consolas" pitchFamily="34" charset="-120"/>
+              </a:rPr>
+              <a:t>kubectl get karssandbox</a:t>
+            </a:r>
+            <a:endParaRPr lang="en-US" sz="1200" dirty="0"/>
+          </a:p>
+        </p:txBody>
+      </p:sp>
+      <p:sp>
+        <p:nvSpPr>
+          <p:cNvPr id="12" name="Text 10"/>
+          <p:cNvSpPr/>
+          <p:nvPr/>
+        </p:nvSpPr>
+        <p:spPr>
+          <a:xfrm>
+            <a:off x="1143000" y="4434840"/>
+            <a:ext cx="10378440" cy="292608"/>
+          </a:xfrm>
+          <a:prstGeom prst="rect">
+            <a:avLst/>
+          </a:prstGeom>
+          <a:noFill/>
+          <a:ln/>
+        </p:spPr>
+        <p:txBody>
+          <a:bodyPr wrap="square" lIns="0" tIns="0" rIns="0" bIns="0" rtlCol="0" anchor="ctr"/>
+          <a:lstStyle/>
+          <a:p>
+            <a:pPr indent="0" marL="0">
+              <a:buNone/>
+            </a:pPr>
+            <a:r>
+              <a:rPr lang="en-US" sz="1100" dirty="0">
+                <a:solidFill>
+                  <a:srgbClr val="6E7681"/>
+                </a:solidFill>
+                <a:latin typeface="Helvetica" pitchFamily="34" charset="0"/>
+                <a:ea typeface="Helvetica" pitchFamily="34" charset="-122"/>
+                <a:cs typeface="Helvetica" pitchFamily="34" charset="-120"/>
+              </a:rPr>
+              <a:t>nothing yet — the cluster is healthy but unused</a:t>
+            </a:r>
+            <a:endParaRPr lang="en-US" sz="1100" dirty="0"/>
+          </a:p>
+        </p:txBody>
+      </p:sp>
+      <p:sp>
+        <p:nvSpPr>
+          <p:cNvPr id="13" name="Shape 11"/>
+          <p:cNvSpPr/>
+          <p:nvPr/>
+        </p:nvSpPr>
+        <p:spPr>
+          <a:xfrm>
+            <a:off x="640080" y="4672584"/>
+            <a:ext cx="10881360" cy="0"/>
+          </a:xfrm>
+          <a:prstGeom prst="line">
+            <a:avLst/>
+          </a:prstGeom>
+          <a:noFill/>
+          <a:ln w="6350">
+            <a:solidFill>
+              <a:srgbClr val="E1E4E8"/>
+            </a:solidFill>
+            <a:prstDash val="solid"/>
+          </a:ln>
+        </p:spPr>
+      </p:sp>
+      <p:sp>
+        <p:nvSpPr>
+          <p:cNvPr id="14" name="Text 12"/>
+          <p:cNvSpPr/>
+          <p:nvPr/>
+        </p:nvSpPr>
+        <p:spPr>
+          <a:xfrm>
+            <a:off x="640080" y="4709160"/>
+            <a:ext cx="411480" cy="548640"/>
+          </a:xfrm>
+          <a:prstGeom prst="rect">
+            <a:avLst/>
+          </a:prstGeom>
+          <a:noFill/>
+          <a:ln/>
+        </p:spPr>
+        <p:txBody>
+          <a:bodyPr wrap="square" lIns="0" tIns="0" rIns="0" bIns="0" rtlCol="0" anchor="t"/>
+          <a:lstStyle/>
+          <a:p>
+            <a:pPr indent="0" marL="0">
+              <a:buNone/>
+            </a:pPr>
+            <a:r>
+              <a:rPr lang="en-US" sz="1800" b="1" dirty="0">
+                <a:solidFill>
+                  <a:srgbClr val="028090"/>
+                </a:solidFill>
+                <a:latin typeface="Consolas" pitchFamily="34" charset="0"/>
+                <a:ea typeface="Consolas" pitchFamily="34" charset="-122"/>
+                <a:cs typeface="Consolas" pitchFamily="34" charset="-120"/>
+              </a:rPr>
+              <a:t>3</a:t>
+            </a:r>
+            <a:endParaRPr lang="en-US" sz="1800" dirty="0"/>
+          </a:p>
+        </p:txBody>
+      </p:sp>
+      <p:sp>
+        <p:nvSpPr>
+          <p:cNvPr id="15" name="Text 13"/>
+          <p:cNvSpPr/>
+          <p:nvPr/>
+        </p:nvSpPr>
+        <p:spPr>
+          <a:xfrm>
+            <a:off x="1143000" y="4709160"/>
+            <a:ext cx="4937760" cy="292608"/>
+          </a:xfrm>
+          <a:prstGeom prst="rect">
+            <a:avLst/>
+          </a:prstGeom>
+          <a:noFill/>
+          <a:ln/>
+        </p:spPr>
+        <p:txBody>
+          <a:bodyPr wrap="square" lIns="0" tIns="0" rIns="0" bIns="0" rtlCol="0" anchor="ctr"/>
+          <a:lstStyle/>
+          <a:p>
+            <a:pPr indent="0" marL="0">
+              <a:buNone/>
+            </a:pPr>
+            <a:r>
+              <a:rPr lang="en-US" sz="1200" dirty="0">
+                <a:solidFill>
+                  <a:srgbClr val="1A1A1A"/>
+                </a:solidFill>
+                <a:latin typeface="Consolas" pitchFamily="34" charset="0"/>
+                <a:ea typeface="Consolas" pitchFamily="34" charset="-122"/>
+                <a:cs typeface="Consolas" pitchFamily="34" charset="-120"/>
+              </a:rPr>
+              <a:t>kars add research-agent --blueprint governed</a:t>
+            </a:r>
+            <a:endParaRPr lang="en-US" sz="1200" dirty="0"/>
+          </a:p>
+        </p:txBody>
+      </p:sp>
+      <p:sp>
+        <p:nvSpPr>
+          <p:cNvPr id="16" name="Text 14"/>
+          <p:cNvSpPr/>
+          <p:nvPr/>
+        </p:nvSpPr>
+        <p:spPr>
+          <a:xfrm>
+            <a:off x="1143000" y="4983480"/>
+            <a:ext cx="10378440" cy="292608"/>
+          </a:xfrm>
+          <a:prstGeom prst="rect">
+            <a:avLst/>
+          </a:prstGeom>
+          <a:noFill/>
+          <a:ln/>
+        </p:spPr>
+        <p:txBody>
+          <a:bodyPr wrap="square" lIns="0" tIns="0" rIns="0" bIns="0" rtlCol="0" anchor="ctr"/>
+          <a:lstStyle/>
+          <a:p>
+            <a:pPr indent="0" marL="0">
+              <a:buNone/>
+            </a:pPr>
+            <a:r>
+              <a:rPr lang="en-US" sz="1100" dirty="0">
+                <a:solidFill>
+                  <a:srgbClr val="6E7681"/>
+                </a:solidFill>
+                <a:latin typeface="Helvetica" pitchFamily="34" charset="0"/>
+                <a:ea typeface="Helvetica" pitchFamily="34" charset="-122"/>
+                <a:cs typeface="Helvetica" pitchFamily="34" charset="-120"/>
+              </a:rPr>
+              <a:t>KarsSandbox CR applied · Namespace + NetworkPolicy + Deployment created · pod Running 2/2</a:t>
+            </a:r>
+            <a:endParaRPr lang="en-US" sz="1100" dirty="0"/>
+          </a:p>
+        </p:txBody>
+      </p:sp>
+      <p:sp>
+        <p:nvSpPr>
+          <p:cNvPr id="17" name="Shape 15"/>
+          <p:cNvSpPr/>
+          <p:nvPr/>
+        </p:nvSpPr>
+        <p:spPr>
+          <a:xfrm>
+            <a:off x="640080" y="5221224"/>
+            <a:ext cx="10881360" cy="0"/>
+          </a:xfrm>
+          <a:prstGeom prst="line">
+            <a:avLst/>
+          </a:prstGeom>
+          <a:noFill/>
+          <a:ln w="6350">
+            <a:solidFill>
+              <a:srgbClr val="E1E4E8"/>
+            </a:solidFill>
+            <a:prstDash val="solid"/>
+          </a:ln>
+        </p:spPr>
+      </p:sp>
+      <p:sp>
+        <p:nvSpPr>
+          <p:cNvPr id="18" name="Text 16"/>
+          <p:cNvSpPr/>
+          <p:nvPr/>
+        </p:nvSpPr>
+        <p:spPr>
+          <a:xfrm>
+            <a:off x="640080" y="5257800"/>
+            <a:ext cx="411480" cy="548640"/>
+          </a:xfrm>
+          <a:prstGeom prst="rect">
+            <a:avLst/>
+          </a:prstGeom>
+          <a:noFill/>
+          <a:ln/>
+        </p:spPr>
+        <p:txBody>
+          <a:bodyPr wrap="square" lIns="0" tIns="0" rIns="0" bIns="0" rtlCol="0" anchor="t"/>
+          <a:lstStyle/>
+          <a:p>
+            <a:pPr indent="0" marL="0">
+              <a:buNone/>
+            </a:pPr>
+            <a:r>
+              <a:rPr lang="en-US" sz="1800" b="1" dirty="0">
+                <a:solidFill>
+                  <a:srgbClr val="028090"/>
+                </a:solidFill>
+                <a:latin typeface="Consolas" pitchFamily="34" charset="0"/>
+                <a:ea typeface="Consolas" pitchFamily="34" charset="-122"/>
+                <a:cs typeface="Consolas" pitchFamily="34" charset="-120"/>
+              </a:rPr>
+              <a:t>4</a:t>
+            </a:r>
+            <a:endParaRPr lang="en-US" sz="1800" dirty="0"/>
+          </a:p>
+        </p:txBody>
+      </p:sp>
+      <p:sp>
+        <p:nvSpPr>
+          <p:cNvPr id="19" name="Text 17"/>
+          <p:cNvSpPr/>
+          <p:nvPr/>
+        </p:nvSpPr>
+        <p:spPr>
+          <a:xfrm>
+            <a:off x="1143000" y="5257800"/>
+            <a:ext cx="4937760" cy="292608"/>
+          </a:xfrm>
+          <a:prstGeom prst="rect">
+            <a:avLst/>
+          </a:prstGeom>
+          <a:noFill/>
+          <a:ln/>
+        </p:spPr>
+        <p:txBody>
+          <a:bodyPr wrap="square" lIns="0" tIns="0" rIns="0" bIns="0" rtlCol="0" anchor="ctr"/>
+          <a:lstStyle/>
+          <a:p>
+            <a:pPr indent="0" marL="0">
+              <a:buNone/>
+            </a:pPr>
+            <a:r>
+              <a:rPr lang="en-US" sz="1200" dirty="0">
+                <a:solidFill>
+                  <a:srgbClr val="1A1A1A"/>
+                </a:solidFill>
+                <a:latin typeface="Consolas" pitchFamily="34" charset="0"/>
+                <a:ea typeface="Consolas" pitchFamily="34" charset="-122"/>
+                <a:cs typeface="Consolas" pitchFamily="34" charset="-120"/>
+              </a:rPr>
+              <a:t>kars connect research-agent</a:t>
+            </a:r>
+            <a:endParaRPr lang="en-US" sz="1200" dirty="0"/>
+          </a:p>
+        </p:txBody>
+      </p:sp>
+      <p:sp>
+        <p:nvSpPr>
+          <p:cNvPr id="20" name="Text 18"/>
+          <p:cNvSpPr/>
+          <p:nvPr/>
+        </p:nvSpPr>
+        <p:spPr>
+          <a:xfrm>
+            <a:off x="1143000" y="5532120"/>
+            <a:ext cx="10378440" cy="292608"/>
+          </a:xfrm>
+          <a:prstGeom prst="rect">
+            <a:avLst/>
+          </a:prstGeom>
+          <a:noFill/>
+          <a:ln/>
+        </p:spPr>
+        <p:txBody>
+          <a:bodyPr wrap="square" lIns="0" tIns="0" rIns="0" bIns="0" rtlCol="0" anchor="ctr"/>
+          <a:lstStyle/>
+          <a:p>
+            <a:pPr indent="0" marL="0">
+              <a:buNone/>
+            </a:pPr>
+            <a:r>
+              <a:rPr lang="en-US" sz="1100" dirty="0">
+                <a:solidFill>
+                  <a:srgbClr val="6E7681"/>
+                </a:solidFill>
+                <a:latin typeface="Helvetica" pitchFamily="34" charset="0"/>
+                <a:ea typeface="Helvetica" pitchFamily="34" charset="-122"/>
+                <a:cs typeface="Helvetica" pitchFamily="34" charset="-120"/>
+              </a:rPr>
+              <a:t>WebUI on :18789 · ask:  "summarise github.com/Azure/kars"</a:t>
+            </a:r>
+            <a:endParaRPr lang="en-US" sz="1100" dirty="0"/>
+          </a:p>
+        </p:txBody>
+      </p:sp>
+      <p:sp>
+        <p:nvSpPr>
+          <p:cNvPr id="21" name="Shape 19"/>
+          <p:cNvSpPr/>
+          <p:nvPr/>
+        </p:nvSpPr>
+        <p:spPr>
+          <a:xfrm>
+            <a:off x="640080" y="5769864"/>
+            <a:ext cx="10881360" cy="0"/>
+          </a:xfrm>
+          <a:prstGeom prst="line">
+            <a:avLst/>
+          </a:prstGeom>
+          <a:noFill/>
+          <a:ln w="6350">
+            <a:solidFill>
+              <a:srgbClr val="E1E4E8"/>
+            </a:solidFill>
+            <a:prstDash val="solid"/>
+          </a:ln>
+        </p:spPr>
+      </p:sp>
+      <p:sp>
+        <p:nvSpPr>
+          <p:cNvPr id="22" name="Text 20"/>
+          <p:cNvSpPr/>
+          <p:nvPr/>
+        </p:nvSpPr>
+        <p:spPr>
+          <a:xfrm>
+            <a:off x="640080" y="5806440"/>
+            <a:ext cx="411480" cy="548640"/>
+          </a:xfrm>
+          <a:prstGeom prst="rect">
+            <a:avLst/>
+          </a:prstGeom>
+          <a:noFill/>
+          <a:ln/>
+        </p:spPr>
+        <p:txBody>
+          <a:bodyPr wrap="square" lIns="0" tIns="0" rIns="0" bIns="0" rtlCol="0" anchor="t"/>
+          <a:lstStyle/>
+          <a:p>
+            <a:pPr indent="0" marL="0">
+              <a:buNone/>
+            </a:pPr>
+            <a:r>
+              <a:rPr lang="en-US" sz="1800" b="1" dirty="0">
+                <a:solidFill>
+                  <a:srgbClr val="028090"/>
+                </a:solidFill>
+                <a:latin typeface="Consolas" pitchFamily="34" charset="0"/>
+                <a:ea typeface="Consolas" pitchFamily="34" charset="-122"/>
+                <a:cs typeface="Consolas" pitchFamily="34" charset="-120"/>
+              </a:rPr>
+              <a:t>5</a:t>
+            </a:r>
+            <a:endParaRPr lang="en-US" sz="1800" dirty="0"/>
+          </a:p>
+        </p:txBody>
+      </p:sp>
+      <p:sp>
+        <p:nvSpPr>
+          <p:cNvPr id="23" name="Text 21"/>
+          <p:cNvSpPr/>
+          <p:nvPr/>
+        </p:nvSpPr>
+        <p:spPr>
+          <a:xfrm>
+            <a:off x="1143000" y="5806440"/>
+            <a:ext cx="4937760" cy="292608"/>
+          </a:xfrm>
+          <a:prstGeom prst="rect">
+            <a:avLst/>
+          </a:prstGeom>
+          <a:noFill/>
+          <a:ln/>
+        </p:spPr>
+        <p:txBody>
+          <a:bodyPr wrap="square" lIns="0" tIns="0" rIns="0" bIns="0" rtlCol="0" anchor="ctr"/>
+          <a:lstStyle/>
+          <a:p>
+            <a:pPr indent="0" marL="0">
+              <a:buNone/>
+            </a:pPr>
+            <a:r>
+              <a:rPr lang="en-US" sz="1200" dirty="0">
+                <a:solidFill>
+                  <a:srgbClr val="1A1A1A"/>
+                </a:solidFill>
+                <a:latin typeface="Consolas" pitchFamily="34" charset="0"/>
+                <a:ea typeface="Consolas" pitchFamily="34" charset="-122"/>
+                <a:cs typeface="Consolas" pitchFamily="34" charset="-120"/>
+              </a:rPr>
+              <a:t>tool web.fetch is gated</a:t>
+            </a:r>
+            <a:endParaRPr lang="en-US" sz="1200" dirty="0"/>
+          </a:p>
+        </p:txBody>
+      </p:sp>
+      <p:sp>
+        <p:nvSpPr>
+          <p:cNvPr id="24" name="Text 22"/>
+          <p:cNvSpPr/>
+          <p:nvPr/>
+        </p:nvSpPr>
+        <p:spPr>
+          <a:xfrm>
+            <a:off x="1143000" y="6080760"/>
+            <a:ext cx="10378440" cy="292608"/>
+          </a:xfrm>
+          <a:prstGeom prst="rect">
+            <a:avLst/>
+          </a:prstGeom>
+          <a:noFill/>
+          <a:ln/>
+        </p:spPr>
+        <p:txBody>
+          <a:bodyPr wrap="square" lIns="0" tIns="0" rIns="0" bIns="0" rtlCol="0" anchor="ctr"/>
+          <a:lstStyle/>
+          <a:p>
+            <a:pPr indent="0" marL="0">
+              <a:buNone/>
+            </a:pPr>
+            <a:r>
+              <a:rPr lang="en-US" sz="1100" dirty="0">
+                <a:solidFill>
+                  <a:srgbClr val="6E7681"/>
+                </a:solidFill>
+                <a:latin typeface="Helvetica" pitchFamily="34" charset="0"/>
+                <a:ea typeface="Helvetica" pitchFamily="34" charset="-122"/>
+                <a:cs typeface="Helvetica" pitchFamily="34" charset="-120"/>
+              </a:rPr>
+              <a:t>ToolPolicy → Telegram approval prompt → approve → fetch → answer + audit row in /audit/events</a:t>
+            </a:r>
+            <a:endParaRPr lang="en-US" sz="1100" dirty="0"/>
+          </a:p>
+        </p:txBody>
+      </p:sp>
+    </p:spTree>
+  </p:cSld>
+  <p:clrMapOvr>
+    <a:masterClrMapping/>
+  </p:clrMapOvr>
+</p:sld>
+</file>
+
+<file path=ppt/slides/slide24.xml><?xml version="1.0" encoding="utf-8"?>
+<p:sld xmlns:a="http://schemas.openxmlformats.org/drawingml/2006/main" xmlns:r="http://schemas.openxmlformats.org/officeDocument/2006/relationships" xmlns:p="http://schemas.openxmlformats.org/presentationml/2006/main">
+  <p:cSld name="Slide 24">
+    <p:bg>
+      <p:bgPr>
+        <a:solidFill>
+          <a:srgbClr val="0A0E1A"/>
+        </a:solidFill>
+      </p:bgPr>
+    </p:bg>
+    <p:spTree>
+      <p:nvGrpSpPr>
+        <p:cNvPr id="1" name=""/>
+        <p:cNvGrpSpPr/>
+        <p:nvPr/>
+      </p:nvGrpSpPr>
+      <p:grpSpPr>
+        <a:xfrm>
+          <a:off x="0" y="0"/>
+          <a:ext cx="0" cy="0"/>
+          <a:chOff x="0" y="0"/>
+          <a:chExt cx="0" cy="0"/>
+        </a:xfrm>
+      </p:grpSpPr>
+      <p:sp>
+        <p:nvSpPr>
+          <p:cNvPr id="2" name="Text 0"/>
+          <p:cNvSpPr/>
+          <p:nvPr/>
+        </p:nvSpPr>
+        <p:spPr>
+          <a:xfrm>
+            <a:off x="640080" y="502920"/>
+            <a:ext cx="10881360" cy="274320"/>
+          </a:xfrm>
+          <a:prstGeom prst="rect">
+            <a:avLst/>
+          </a:prstGeom>
+          <a:noFill/>
+          <a:ln/>
+        </p:spPr>
+        <p:txBody>
+          <a:bodyPr wrap="square" lIns="0" tIns="0" rIns="0" bIns="0" rtlCol="0" anchor="ctr"/>
+          <a:lstStyle/>
+          <a:p>
+            <a:pPr indent="0" marL="0">
+              <a:buNone/>
+            </a:pPr>
+            <a:r>
+              <a:rPr lang="en-US" sz="1100" spc="400" kern="0" dirty="0">
+                <a:solidFill>
+                  <a:srgbClr val="AFB3BD"/>
+                </a:solidFill>
+                <a:latin typeface="Helvetica" pitchFamily="34" charset="0"/>
+                <a:ea typeface="Helvetica" pitchFamily="34" charset="-122"/>
+                <a:cs typeface="Helvetica" pitchFamily="34" charset="-120"/>
+              </a:rPr>
+              <a:t>§12.1 · BETWEEN ACTS</a:t>
+            </a:r>
+            <a:endParaRPr lang="en-US" sz="1100" dirty="0"/>
+          </a:p>
+        </p:txBody>
+      </p:sp>
+      <p:sp>
+        <p:nvSpPr>
+          <p:cNvPr id="3" name="Text 1"/>
+          <p:cNvSpPr/>
+          <p:nvPr/>
+        </p:nvSpPr>
+        <p:spPr>
+          <a:xfrm>
+            <a:off x="640080" y="1463040"/>
+            <a:ext cx="10881360" cy="1463040"/>
+          </a:xfrm>
+          <a:prstGeom prst="rect">
+            <a:avLst/>
+          </a:prstGeom>
+          <a:noFill/>
+          <a:ln/>
+        </p:spPr>
+        <p:txBody>
+          <a:bodyPr wrap="square" lIns="0" tIns="0" rIns="0" bIns="0" rtlCol="0" anchor="t"/>
+          <a:lstStyle/>
+          <a:p>
+            <a:pPr algn="l" indent="0" marL="0">
+              <a:buNone/>
+            </a:pPr>
+            <a:r>
+              <a:rPr lang="en-US" sz="5600" b="1" dirty="0">
+                <a:solidFill>
+                  <a:srgbClr val="FFFFFF"/>
+                </a:solidFill>
+                <a:latin typeface="Helvetica" pitchFamily="34" charset="0"/>
+                <a:ea typeface="Helvetica" pitchFamily="34" charset="-122"/>
+                <a:cs typeface="Helvetica" pitchFamily="34" charset="-120"/>
+              </a:rPr>
+              <a:t>Same cluster.  Second agent.</a:t>
+            </a:r>
+            <a:endParaRPr lang="en-US" sz="5600" dirty="0"/>
+          </a:p>
+        </p:txBody>
+      </p:sp>
+      <p:sp>
+        <p:nvSpPr>
+          <p:cNvPr id="4" name="Text 2"/>
+          <p:cNvSpPr/>
+          <p:nvPr/>
+        </p:nvSpPr>
+        <p:spPr>
+          <a:xfrm>
+            <a:off x="640080" y="3291840"/>
+            <a:ext cx="10881360" cy="1463040"/>
+          </a:xfrm>
+          <a:prstGeom prst="rect">
+            <a:avLst/>
+          </a:prstGeom>
+          <a:noFill/>
+          <a:ln/>
+        </p:spPr>
+        <p:txBody>
+          <a:bodyPr wrap="square" lIns="0" tIns="0" rIns="0" bIns="0" rtlCol="0" anchor="t"/>
+          <a:lstStyle/>
+          <a:p>
+            <a:pPr algn="l" indent="0" marL="0">
+              <a:spcAft>
+                <a:spcPts val="800"/>
+              </a:spcAft>
+              <a:buNone/>
+            </a:pPr>
+            <a:r>
+              <a:rPr lang="en-US" sz="2600" dirty="0">
+                <a:solidFill>
+                  <a:srgbClr val="E6F1F2"/>
+                </a:solidFill>
+                <a:latin typeface="Helvetica" pitchFamily="34" charset="0"/>
+                <a:ea typeface="Helvetica" pitchFamily="34" charset="-122"/>
+                <a:cs typeface="Helvetica" pitchFamily="34" charset="-120"/>
+              </a:rPr>
+              <a:t>If you can run a research agent on kars, you can run an SRE one.  Same isolation, same policy plane, same audit log — just different tools.</a:t>
+            </a:r>
+            <a:endParaRPr lang="en-US" sz="2600" dirty="0"/>
+          </a:p>
+        </p:txBody>
+      </p:sp>
+      <p:sp>
+        <p:nvSpPr>
+          <p:cNvPr id="5" name="Text 3"/>
+          <p:cNvSpPr/>
+          <p:nvPr/>
+        </p:nvSpPr>
+        <p:spPr>
+          <a:xfrm>
+            <a:off x="640080" y="5120640"/>
+            <a:ext cx="10881360" cy="548640"/>
+          </a:xfrm>
+          <a:prstGeom prst="rect">
+            <a:avLst/>
+          </a:prstGeom>
+          <a:noFill/>
+          <a:ln/>
+        </p:spPr>
+        <p:txBody>
+          <a:bodyPr wrap="square" lIns="0" tIns="0" rIns="0" bIns="0" rtlCol="0" anchor="ctr"/>
+          <a:lstStyle/>
+          <a:p>
+            <a:pPr algn="l" indent="0" marL="0">
+              <a:buNone/>
+            </a:pPr>
+            <a:r>
+              <a:rPr lang="en-US" sz="1800" dirty="0">
+                <a:solidFill>
+                  <a:srgbClr val="AFB3BD"/>
+                </a:solidFill>
+                <a:latin typeface="Helvetica" pitchFamily="34" charset="0"/>
+                <a:ea typeface="Helvetica" pitchFamily="34" charset="-122"/>
+                <a:cs typeface="Helvetica" pitchFamily="34" charset="-120"/>
+              </a:rPr>
+              <a:t>And — with your approval — it can fix things for you.</a:t>
+            </a:r>
+            <a:endParaRPr lang="en-US" sz="1800" dirty="0"/>
+          </a:p>
+        </p:txBody>
+      </p:sp>
+    </p:spTree>
+  </p:cSld>
+  <p:clrMapOvr>
+    <a:masterClrMapping/>
+  </p:clrMapOvr>
+</p:sld>
+</file>
+
+<file path=ppt/slides/slide25.xml><?xml version="1.0" encoding="utf-8"?>
+<p:sld xmlns:a="http://schemas.openxmlformats.org/drawingml/2006/main" xmlns:r="http://schemas.openxmlformats.org/officeDocument/2006/relationships" xmlns:p="http://schemas.openxmlformats.org/presentationml/2006/main">
+  <p:cSld name="Slide 25">
+    <p:bg>
+      <p:bgPr>
+        <a:solidFill>
+          <a:srgbClr val="FFFFFF"/>
+        </a:solidFill>
+      </p:bgPr>
+    </p:bg>
+    <p:spTree>
+      <p:nvGrpSpPr>
+        <p:cNvPr id="1" name=""/>
+        <p:cNvGrpSpPr/>
+        <p:nvPr/>
+      </p:nvGrpSpPr>
+      <p:grpSpPr>
+        <a:xfrm>
+          <a:off x="0" y="0"/>
+          <a:ext cx="0" cy="0"/>
+          <a:chOff x="0" y="0"/>
+          <a:chExt cx="0" cy="0"/>
+        </a:xfrm>
+      </p:grpSpPr>
+      <p:sp>
+        <p:nvSpPr>
+          <p:cNvPr id="2" name="Text 0"/>
+          <p:cNvSpPr/>
+          <p:nvPr/>
+        </p:nvSpPr>
+        <p:spPr>
+          <a:xfrm>
+            <a:off x="11155680" y="6400800"/>
+            <a:ext cx="365760" cy="274320"/>
+          </a:xfrm>
+          <a:prstGeom prst="rect">
+            <a:avLst/>
+          </a:prstGeom>
+          <a:noFill/>
+          <a:ln/>
+        </p:spPr>
+        <p:txBody>
+          <a:bodyPr wrap="square" lIns="0" tIns="0" rIns="0" bIns="0" rtlCol="0" anchor="ctr"/>
+          <a:lstStyle/>
+          <a:p>
+            <a:pPr algn="r" indent="0" marL="0">
+              <a:buNone/>
+            </a:pPr>
+            <a:r>
+              <a:rPr lang="en-US" sz="1000" dirty="0">
+                <a:solidFill>
+                  <a:srgbClr val="AFB3BD"/>
+                </a:solidFill>
+                <a:latin typeface="Helvetica" pitchFamily="34" charset="0"/>
+                <a:ea typeface="Helvetica" pitchFamily="34" charset="-122"/>
+                <a:cs typeface="Helvetica" pitchFamily="34" charset="-120"/>
+              </a:rPr>
+              <a:t>25</a:t>
+            </a:r>
+            <a:endParaRPr lang="en-US" sz="1000" dirty="0"/>
+          </a:p>
+        </p:txBody>
+      </p:sp>
+      <p:sp>
+        <p:nvSpPr>
+          <p:cNvPr id="3" name="Text 1"/>
+          <p:cNvSpPr/>
+          <p:nvPr/>
+        </p:nvSpPr>
+        <p:spPr>
+          <a:xfrm>
+            <a:off x="640080" y="502920"/>
+            <a:ext cx="10881360" cy="274320"/>
+          </a:xfrm>
+          <a:prstGeom prst="rect">
+            <a:avLst/>
+          </a:prstGeom>
+          <a:noFill/>
+          <a:ln/>
+        </p:spPr>
+        <p:txBody>
+          <a:bodyPr wrap="square" lIns="0" tIns="0" rIns="0" bIns="0" rtlCol="0" anchor="ctr"/>
+          <a:lstStyle/>
+          <a:p>
+            <a:pPr indent="0" marL="0">
+              <a:buNone/>
+            </a:pPr>
+            <a:r>
+              <a:rPr lang="en-US" sz="1100" spc="400" kern="0" dirty="0">
+                <a:solidFill>
+                  <a:srgbClr val="6E7681"/>
+                </a:solidFill>
+                <a:latin typeface="Helvetica" pitchFamily="34" charset="0"/>
+                <a:ea typeface="Helvetica" pitchFamily="34" charset="-122"/>
+                <a:cs typeface="Helvetica" pitchFamily="34" charset="-120"/>
+              </a:rPr>
+              <a:t>§12.2 · LIVE DEMO · ACT II</a:t>
+            </a:r>
+            <a:endParaRPr lang="en-US" sz="1100" dirty="0"/>
+          </a:p>
+        </p:txBody>
+      </p:sp>
+      <p:sp>
+        <p:nvSpPr>
+          <p:cNvPr id="4" name="Text 2"/>
+          <p:cNvSpPr/>
+          <p:nvPr/>
+        </p:nvSpPr>
+        <p:spPr>
+          <a:xfrm>
+            <a:off x="640080" y="914400"/>
+            <a:ext cx="10881360" cy="1280160"/>
+          </a:xfrm>
+          <a:prstGeom prst="rect">
+            <a:avLst/>
+          </a:prstGeom>
+          <a:noFill/>
+          <a:ln/>
+        </p:spPr>
+        <p:txBody>
+          <a:bodyPr wrap="square" lIns="0" tIns="0" rIns="0" bIns="0" rtlCol="0" anchor="t"/>
+          <a:lstStyle/>
+          <a:p>
+            <a:pPr algn="l" indent="0" marL="0">
+              <a:buNone/>
+            </a:pPr>
+            <a:r>
+              <a:rPr lang="en-US" sz="3200" b="1" dirty="0">
+                <a:solidFill>
+                  <a:srgbClr val="1A1A1A"/>
+                </a:solidFill>
+                <a:latin typeface="Helvetica" pitchFamily="34" charset="0"/>
+                <a:ea typeface="Helvetica" pitchFamily="34" charset="-122"/>
+                <a:cs typeface="Helvetica" pitchFamily="34" charset="-120"/>
+              </a:rPr>
+              <a:t>The cluster fixes itself.  With your nod.</a:t>
+            </a:r>
+            <a:endParaRPr lang="en-US" sz="3200" dirty="0"/>
+          </a:p>
+        </p:txBody>
+      </p:sp>
+      <p:sp>
+        <p:nvSpPr>
+          <p:cNvPr id="5" name="Text 3"/>
+          <p:cNvSpPr/>
+          <p:nvPr/>
+        </p:nvSpPr>
+        <p:spPr>
+          <a:xfrm>
+            <a:off x="640080" y="2240280"/>
+            <a:ext cx="10881360" cy="1371600"/>
+          </a:xfrm>
+          <a:prstGeom prst="rect">
+            <a:avLst/>
+          </a:prstGeom>
+          <a:noFill/>
+          <a:ln/>
+        </p:spPr>
+        <p:txBody>
+          <a:bodyPr wrap="square" lIns="0" tIns="0" rIns="0" bIns="0" rtlCol="0" anchor="t"/>
+          <a:lstStyle/>
+          <a:p>
+            <a:pPr algn="l" indent="0" marL="0">
+              <a:spcAft>
+                <a:spcPts val="800"/>
+              </a:spcAft>
+              <a:buNone/>
+            </a:pPr>
+            <a:r>
+              <a:rPr lang="en-US" sz="1800" dirty="0">
+                <a:solidFill>
+                  <a:srgbClr val="1A1A1A"/>
+                </a:solidFill>
+                <a:latin typeface="Helvetica" pitchFamily="34" charset="0"/>
+                <a:ea typeface="Helvetica" pitchFamily="34" charset="-122"/>
+                <a:cs typeface="Helvetica" pitchFamily="34" charset="-120"/>
+              </a:rPr>
+              <a:t>Drop an SRE agent onto the same cluster.  Break something on purpose.  Watch the agent ping Telegram, diagnose the cause, propose a fix, wait for the operator's approval — then apply it and confirm the recovery.</a:t>
+            </a:r>
+            <a:endParaRPr lang="en-US" sz="1800" dirty="0"/>
+          </a:p>
+        </p:txBody>
+      </p:sp>
+      <p:sp>
+        <p:nvSpPr>
+          <p:cNvPr id="6" name="Text 4"/>
+          <p:cNvSpPr/>
+          <p:nvPr/>
+        </p:nvSpPr>
+        <p:spPr>
+          <a:xfrm>
+            <a:off x="640080" y="3703320"/>
+            <a:ext cx="411480" cy="502920"/>
+          </a:xfrm>
+          <a:prstGeom prst="rect">
+            <a:avLst/>
+          </a:prstGeom>
+          <a:noFill/>
+          <a:ln/>
+        </p:spPr>
+        <p:txBody>
+          <a:bodyPr wrap="square" lIns="0" tIns="0" rIns="0" bIns="0" rtlCol="0" anchor="t"/>
+          <a:lstStyle/>
+          <a:p>
+            <a:pPr indent="0" marL="0">
+              <a:buNone/>
+            </a:pPr>
+            <a:r>
+              <a:rPr lang="en-US" sz="1800" b="1" dirty="0">
+                <a:solidFill>
+                  <a:srgbClr val="028090"/>
+                </a:solidFill>
+                <a:latin typeface="Consolas" pitchFamily="34" charset="0"/>
+                <a:ea typeface="Consolas" pitchFamily="34" charset="-122"/>
+                <a:cs typeface="Consolas" pitchFamily="34" charset="-120"/>
+              </a:rPr>
+              <a:t>1</a:t>
+            </a:r>
+            <a:endParaRPr lang="en-US" sz="1800" dirty="0"/>
+          </a:p>
+        </p:txBody>
+      </p:sp>
+      <p:sp>
+        <p:nvSpPr>
+          <p:cNvPr id="7" name="Text 5"/>
+          <p:cNvSpPr/>
+          <p:nvPr/>
+        </p:nvSpPr>
+        <p:spPr>
+          <a:xfrm>
+            <a:off x="1143000" y="3703320"/>
+            <a:ext cx="10378440" cy="274320"/>
+          </a:xfrm>
+          <a:prstGeom prst="rect">
+            <a:avLst/>
+          </a:prstGeom>
+          <a:noFill/>
+          <a:ln/>
+        </p:spPr>
+        <p:txBody>
+          <a:bodyPr wrap="square" lIns="0" tIns="0" rIns="0" bIns="0" rtlCol="0" anchor="ctr"/>
+          <a:lstStyle/>
+          <a:p>
+            <a:pPr indent="0" marL="0">
+              <a:buNone/>
+            </a:pPr>
+            <a:r>
+              <a:rPr lang="en-US" sz="1200" dirty="0">
+                <a:solidFill>
+                  <a:srgbClr val="1A1A1A"/>
+                </a:solidFill>
+                <a:latin typeface="Consolas" pitchFamily="34" charset="0"/>
+                <a:ea typeface="Consolas" pitchFamily="34" charset="-122"/>
+                <a:cs typeface="Consolas" pitchFamily="34" charset="-120"/>
+              </a:rPr>
+              <a:t>kars install sre</a:t>
+            </a:r>
+            <a:endParaRPr lang="en-US" sz="1200" dirty="0"/>
+          </a:p>
+        </p:txBody>
+      </p:sp>
+      <p:sp>
+        <p:nvSpPr>
+          <p:cNvPr id="8" name="Text 6"/>
+          <p:cNvSpPr/>
+          <p:nvPr/>
+        </p:nvSpPr>
+        <p:spPr>
+          <a:xfrm>
+            <a:off x="1143000" y="3959352"/>
+            <a:ext cx="10378440" cy="274320"/>
+          </a:xfrm>
+          <a:prstGeom prst="rect">
+            <a:avLst/>
+          </a:prstGeom>
+          <a:noFill/>
+          <a:ln/>
+        </p:spPr>
+        <p:txBody>
+          <a:bodyPr wrap="square" lIns="0" tIns="0" rIns="0" bIns="0" rtlCol="0" anchor="ctr"/>
+          <a:lstStyle/>
+          <a:p>
+            <a:pPr indent="0" marL="0">
+              <a:buNone/>
+            </a:pPr>
+            <a:r>
+              <a:rPr lang="en-US" sz="1050" dirty="0">
+                <a:solidFill>
+                  <a:srgbClr val="6E7681"/>
+                </a:solidFill>
+                <a:latin typeface="Helvetica" pitchFamily="34" charset="0"/>
+                <a:ea typeface="Helvetica" pitchFamily="34" charset="-122"/>
+                <a:cs typeface="Helvetica" pitchFamily="34" charset="-120"/>
+              </a:rPr>
+              <a:t>kars-sre sandbox up · 5 read-only kubectl tools · 2 approval-gated mutators (patch / scale)</a:t>
+            </a:r>
+            <a:endParaRPr lang="en-US" sz="1050" dirty="0"/>
+          </a:p>
+        </p:txBody>
+      </p:sp>
+      <p:sp>
+        <p:nvSpPr>
+          <p:cNvPr id="9" name="Shape 7"/>
+          <p:cNvSpPr/>
+          <p:nvPr/>
+        </p:nvSpPr>
+        <p:spPr>
+          <a:xfrm>
+            <a:off x="640080" y="4169664"/>
+            <a:ext cx="10881360" cy="0"/>
+          </a:xfrm>
+          <a:prstGeom prst="line">
+            <a:avLst/>
+          </a:prstGeom>
+          <a:noFill/>
+          <a:ln w="6350">
+            <a:solidFill>
+              <a:srgbClr val="E1E4E8"/>
+            </a:solidFill>
+            <a:prstDash val="solid"/>
+          </a:ln>
+        </p:spPr>
+      </p:sp>
+      <p:sp>
+        <p:nvSpPr>
+          <p:cNvPr id="10" name="Text 8"/>
+          <p:cNvSpPr/>
+          <p:nvPr/>
+        </p:nvSpPr>
+        <p:spPr>
+          <a:xfrm>
+            <a:off x="640080" y="4206240"/>
+            <a:ext cx="411480" cy="502920"/>
+          </a:xfrm>
+          <a:prstGeom prst="rect">
+            <a:avLst/>
+          </a:prstGeom>
+          <a:noFill/>
+          <a:ln/>
+        </p:spPr>
+        <p:txBody>
+          <a:bodyPr wrap="square" lIns="0" tIns="0" rIns="0" bIns="0" rtlCol="0" anchor="t"/>
+          <a:lstStyle/>
+          <a:p>
+            <a:pPr indent="0" marL="0">
+              <a:buNone/>
+            </a:pPr>
+            <a:r>
+              <a:rPr lang="en-US" sz="1800" b="1" dirty="0">
+                <a:solidFill>
+                  <a:srgbClr val="028090"/>
+                </a:solidFill>
+                <a:latin typeface="Consolas" pitchFamily="34" charset="0"/>
+                <a:ea typeface="Consolas" pitchFamily="34" charset="-122"/>
+                <a:cs typeface="Consolas" pitchFamily="34" charset="-120"/>
+              </a:rPr>
+              <a:t>2</a:t>
+            </a:r>
+            <a:endParaRPr lang="en-US" sz="1800" dirty="0"/>
+          </a:p>
+        </p:txBody>
+      </p:sp>
+      <p:sp>
+        <p:nvSpPr>
+          <p:cNvPr id="11" name="Text 9"/>
+          <p:cNvSpPr/>
+          <p:nvPr/>
+        </p:nvSpPr>
+        <p:spPr>
+          <a:xfrm>
+            <a:off x="1143000" y="4206240"/>
+            <a:ext cx="10378440" cy="274320"/>
+          </a:xfrm>
+          <a:prstGeom prst="rect">
+            <a:avLst/>
+          </a:prstGeom>
+          <a:noFill/>
+          <a:ln/>
+        </p:spPr>
+        <p:txBody>
+          <a:bodyPr wrap="square" lIns="0" tIns="0" rIns="0" bIns="0" rtlCol="0" anchor="ctr"/>
+          <a:lstStyle/>
+          <a:p>
+            <a:pPr indent="0" marL="0">
+              <a:buNone/>
+            </a:pPr>
+            <a:r>
+              <a:rPr lang="en-US" sz="1200" dirty="0">
+                <a:solidFill>
+                  <a:srgbClr val="1A1A1A"/>
+                </a:solidFill>
+                <a:latin typeface="Consolas" pitchFamily="34" charset="0"/>
+                <a:ea typeface="Consolas" pitchFamily="34" charset="-122"/>
+                <a:cs typeface="Consolas" pitchFamily="34" charset="-120"/>
+              </a:rPr>
+              <a:t>( something breaks )</a:t>
+            </a:r>
+            <a:endParaRPr lang="en-US" sz="1200" dirty="0"/>
+          </a:p>
+        </p:txBody>
+      </p:sp>
+      <p:sp>
+        <p:nvSpPr>
+          <p:cNvPr id="12" name="Text 10"/>
+          <p:cNvSpPr/>
+          <p:nvPr/>
+        </p:nvSpPr>
+        <p:spPr>
+          <a:xfrm>
+            <a:off x="1143000" y="4462272"/>
+            <a:ext cx="10378440" cy="274320"/>
+          </a:xfrm>
+          <a:prstGeom prst="rect">
+            <a:avLst/>
+          </a:prstGeom>
+          <a:noFill/>
+          <a:ln/>
+        </p:spPr>
+        <p:txBody>
+          <a:bodyPr wrap="square" lIns="0" tIns="0" rIns="0" bIns="0" rtlCol="0" anchor="ctr"/>
+          <a:lstStyle/>
+          <a:p>
+            <a:pPr indent="0" marL="0">
+              <a:buNone/>
+            </a:pPr>
+            <a:r>
+              <a:rPr lang="en-US" sz="1050" dirty="0">
+                <a:solidFill>
+                  <a:srgbClr val="6E7681"/>
+                </a:solidFill>
+                <a:latin typeface="Helvetica" pitchFamily="34" charset="0"/>
+                <a:ea typeface="Helvetica" pitchFamily="34" charset="-122"/>
+                <a:cs typeface="Helvetica" pitchFamily="34" charset="-120"/>
+              </a:rPr>
+              <a:t>NetworkPolicy 'kars-mesh-egress' loses the :8083 allow → research-agent goes Pending</a:t>
+            </a:r>
+            <a:endParaRPr lang="en-US" sz="1050" dirty="0"/>
+          </a:p>
+        </p:txBody>
+      </p:sp>
+      <p:sp>
+        <p:nvSpPr>
+          <p:cNvPr id="13" name="Shape 11"/>
+          <p:cNvSpPr/>
+          <p:nvPr/>
+        </p:nvSpPr>
+        <p:spPr>
+          <a:xfrm>
+            <a:off x="640080" y="4672584"/>
+            <a:ext cx="10881360" cy="0"/>
+          </a:xfrm>
+          <a:prstGeom prst="line">
+            <a:avLst/>
+          </a:prstGeom>
+          <a:noFill/>
+          <a:ln w="6350">
+            <a:solidFill>
+              <a:srgbClr val="E1E4E8"/>
+            </a:solidFill>
+            <a:prstDash val="solid"/>
+          </a:ln>
+        </p:spPr>
+      </p:sp>
+      <p:sp>
+        <p:nvSpPr>
+          <p:cNvPr id="14" name="Text 12"/>
+          <p:cNvSpPr/>
+          <p:nvPr/>
+        </p:nvSpPr>
+        <p:spPr>
+          <a:xfrm>
+            <a:off x="640080" y="4709160"/>
+            <a:ext cx="411480" cy="502920"/>
+          </a:xfrm>
+          <a:prstGeom prst="rect">
+            <a:avLst/>
+          </a:prstGeom>
+          <a:noFill/>
+          <a:ln/>
+        </p:spPr>
+        <p:txBody>
+          <a:bodyPr wrap="square" lIns="0" tIns="0" rIns="0" bIns="0" rtlCol="0" anchor="t"/>
+          <a:lstStyle/>
+          <a:p>
+            <a:pPr indent="0" marL="0">
+              <a:buNone/>
+            </a:pPr>
+            <a:r>
+              <a:rPr lang="en-US" sz="1800" b="1" dirty="0">
+                <a:solidFill>
+                  <a:srgbClr val="028090"/>
+                </a:solidFill>
+                <a:latin typeface="Consolas" pitchFamily="34" charset="0"/>
+                <a:ea typeface="Consolas" pitchFamily="34" charset="-122"/>
+                <a:cs typeface="Consolas" pitchFamily="34" charset="-120"/>
+              </a:rPr>
+              <a:t>3</a:t>
+            </a:r>
+            <a:endParaRPr lang="en-US" sz="1800" dirty="0"/>
+          </a:p>
+        </p:txBody>
+      </p:sp>
+      <p:sp>
+        <p:nvSpPr>
+          <p:cNvPr id="15" name="Text 13"/>
+          <p:cNvSpPr/>
+          <p:nvPr/>
+        </p:nvSpPr>
+        <p:spPr>
+          <a:xfrm>
+            <a:off x="1143000" y="4709160"/>
+            <a:ext cx="10378440" cy="274320"/>
+          </a:xfrm>
+          <a:prstGeom prst="rect">
+            <a:avLst/>
+          </a:prstGeom>
+          <a:noFill/>
+          <a:ln/>
+        </p:spPr>
+        <p:txBody>
+          <a:bodyPr wrap="square" lIns="0" tIns="0" rIns="0" bIns="0" rtlCol="0" anchor="ctr"/>
+          <a:lstStyle/>
+          <a:p>
+            <a:pPr indent="0" marL="0">
+              <a:buNone/>
+            </a:pPr>
+            <a:r>
+              <a:rPr lang="en-US" sz="1200" dirty="0">
+                <a:solidFill>
+                  <a:srgbClr val="1A1A1A"/>
+                </a:solidFill>
+                <a:latin typeface="Consolas" pitchFamily="34" charset="0"/>
+                <a:ea typeface="Consolas" pitchFamily="34" charset="-122"/>
+                <a:cs typeface="Consolas" pitchFamily="34" charset="-120"/>
+              </a:rPr>
+              <a:t>telegram ping  ◀  kars-sre</a:t>
+            </a:r>
+            <a:endParaRPr lang="en-US" sz="1200" dirty="0"/>
+          </a:p>
+        </p:txBody>
+      </p:sp>
+      <p:sp>
+        <p:nvSpPr>
+          <p:cNvPr id="16" name="Text 14"/>
+          <p:cNvSpPr/>
+          <p:nvPr/>
+        </p:nvSpPr>
+        <p:spPr>
+          <a:xfrm>
+            <a:off x="1143000" y="4965192"/>
+            <a:ext cx="10378440" cy="274320"/>
+          </a:xfrm>
+          <a:prstGeom prst="rect">
+            <a:avLst/>
+          </a:prstGeom>
+          <a:noFill/>
+          <a:ln/>
+        </p:spPr>
+        <p:txBody>
+          <a:bodyPr wrap="square" lIns="0" tIns="0" rIns="0" bIns="0" rtlCol="0" anchor="ctr"/>
+          <a:lstStyle/>
+          <a:p>
+            <a:pPr indent="0" marL="0">
+              <a:buNone/>
+            </a:pPr>
+            <a:r>
+              <a:rPr lang="en-US" sz="1050" dirty="0">
+                <a:solidFill>
+                  <a:srgbClr val="6E7681"/>
+                </a:solidFill>
+                <a:latin typeface="Helvetica" pitchFamily="34" charset="0"/>
+                <a:ea typeface="Helvetica" pitchFamily="34" charset="-122"/>
+                <a:cs typeface="Helvetica" pitchFamily="34" charset="-120"/>
+              </a:rPr>
+              <a:t>"research-agent has been Pending for 3 min.  Likely cause:  NP kars-mesh-egress denying TCP/8083 to agentmesh-relay."</a:t>
+            </a:r>
+            <a:endParaRPr lang="en-US" sz="1050" dirty="0"/>
+          </a:p>
+        </p:txBody>
+      </p:sp>
+      <p:sp>
+        <p:nvSpPr>
+          <p:cNvPr id="17" name="Shape 15"/>
+          <p:cNvSpPr/>
+          <p:nvPr/>
+        </p:nvSpPr>
+        <p:spPr>
+          <a:xfrm>
+            <a:off x="640080" y="5175504"/>
+            <a:ext cx="10881360" cy="0"/>
+          </a:xfrm>
+          <a:prstGeom prst="line">
+            <a:avLst/>
+          </a:prstGeom>
+          <a:noFill/>
+          <a:ln w="6350">
+            <a:solidFill>
+              <a:srgbClr val="E1E4E8"/>
+            </a:solidFill>
+            <a:prstDash val="solid"/>
+          </a:ln>
+        </p:spPr>
+      </p:sp>
+      <p:sp>
+        <p:nvSpPr>
+          <p:cNvPr id="18" name="Text 16"/>
+          <p:cNvSpPr/>
+          <p:nvPr/>
+        </p:nvSpPr>
+        <p:spPr>
+          <a:xfrm>
+            <a:off x="640080" y="5212080"/>
+            <a:ext cx="411480" cy="502920"/>
+          </a:xfrm>
+          <a:prstGeom prst="rect">
+            <a:avLst/>
+          </a:prstGeom>
+          <a:noFill/>
+          <a:ln/>
+        </p:spPr>
+        <p:txBody>
+          <a:bodyPr wrap="square" lIns="0" tIns="0" rIns="0" bIns="0" rtlCol="0" anchor="t"/>
+          <a:lstStyle/>
+          <a:p>
+            <a:pPr indent="0" marL="0">
+              <a:buNone/>
+            </a:pPr>
+            <a:r>
+              <a:rPr lang="en-US" sz="1800" b="1" dirty="0">
+                <a:solidFill>
+                  <a:srgbClr val="028090"/>
+                </a:solidFill>
+                <a:latin typeface="Consolas" pitchFamily="34" charset="0"/>
+                <a:ea typeface="Consolas" pitchFamily="34" charset="-122"/>
+                <a:cs typeface="Consolas" pitchFamily="34" charset="-120"/>
+              </a:rPr>
+              <a:t>4</a:t>
+            </a:r>
+            <a:endParaRPr lang="en-US" sz="1800" dirty="0"/>
+          </a:p>
+        </p:txBody>
+      </p:sp>
+      <p:sp>
+        <p:nvSpPr>
+          <p:cNvPr id="19" name="Text 17"/>
+          <p:cNvSpPr/>
+          <p:nvPr/>
+        </p:nvSpPr>
+        <p:spPr>
+          <a:xfrm>
+            <a:off x="1143000" y="5212080"/>
+            <a:ext cx="10378440" cy="274320"/>
+          </a:xfrm>
+          <a:prstGeom prst="rect">
+            <a:avLst/>
+          </a:prstGeom>
+          <a:noFill/>
+          <a:ln/>
+        </p:spPr>
+        <p:txBody>
+          <a:bodyPr wrap="square" lIns="0" tIns="0" rIns="0" bIns="0" rtlCol="0" anchor="ctr"/>
+          <a:lstStyle/>
+          <a:p>
+            <a:pPr indent="0" marL="0">
+              <a:buNone/>
+            </a:pPr>
+            <a:r>
+              <a:rPr lang="en-US" sz="1200" dirty="0">
+                <a:solidFill>
+                  <a:srgbClr val="1A1A1A"/>
+                </a:solidFill>
+                <a:latin typeface="Consolas" pitchFamily="34" charset="0"/>
+                <a:ea typeface="Consolas" pitchFamily="34" charset="-122"/>
+                <a:cs typeface="Consolas" pitchFamily="34" charset="-120"/>
+              </a:rPr>
+              <a:t>kars connect sre  →  "give me the health overview"</a:t>
+            </a:r>
+            <a:endParaRPr lang="en-US" sz="1200" dirty="0"/>
+          </a:p>
+        </p:txBody>
+      </p:sp>
+      <p:sp>
+        <p:nvSpPr>
+          <p:cNvPr id="20" name="Text 18"/>
+          <p:cNvSpPr/>
+          <p:nvPr/>
+        </p:nvSpPr>
+        <p:spPr>
+          <a:xfrm>
+            <a:off x="1143000" y="5468112"/>
+            <a:ext cx="10378440" cy="274320"/>
+          </a:xfrm>
+          <a:prstGeom prst="rect">
+            <a:avLst/>
+          </a:prstGeom>
+          <a:noFill/>
+          <a:ln/>
+        </p:spPr>
+        <p:txBody>
+          <a:bodyPr wrap="square" lIns="0" tIns="0" rIns="0" bIns="0" rtlCol="0" anchor="ctr"/>
+          <a:lstStyle/>
+          <a:p>
+            <a:pPr indent="0" marL="0">
+              <a:buNone/>
+            </a:pPr>
+            <a:r>
+              <a:rPr lang="en-US" sz="1050" dirty="0">
+                <a:solidFill>
+                  <a:srgbClr val="6E7681"/>
+                </a:solidFill>
+                <a:latin typeface="Helvetica" pitchFamily="34" charset="0"/>
+                <a:ea typeface="Helvetica" pitchFamily="34" charset="-122"/>
+                <a:cs typeface="Helvetica" pitchFamily="34" charset="-120"/>
+              </a:rPr>
+              <a:t>3 sandboxes · 1 Pending · proposed fix:  patch NetworkPolicy egress rule (port 8083)  ·  awaiting approval</a:t>
+            </a:r>
+            <a:endParaRPr lang="en-US" sz="1050" dirty="0"/>
+          </a:p>
+        </p:txBody>
+      </p:sp>
+      <p:sp>
+        <p:nvSpPr>
+          <p:cNvPr id="21" name="Shape 19"/>
+          <p:cNvSpPr/>
+          <p:nvPr/>
+        </p:nvSpPr>
+        <p:spPr>
+          <a:xfrm>
+            <a:off x="640080" y="5678424"/>
+            <a:ext cx="10881360" cy="0"/>
+          </a:xfrm>
+          <a:prstGeom prst="line">
+            <a:avLst/>
+          </a:prstGeom>
+          <a:noFill/>
+          <a:ln w="6350">
+            <a:solidFill>
+              <a:srgbClr val="E1E4E8"/>
+            </a:solidFill>
+            <a:prstDash val="solid"/>
+          </a:ln>
+        </p:spPr>
+      </p:sp>
+      <p:sp>
+        <p:nvSpPr>
+          <p:cNvPr id="22" name="Text 20"/>
+          <p:cNvSpPr/>
+          <p:nvPr/>
+        </p:nvSpPr>
+        <p:spPr>
+          <a:xfrm>
+            <a:off x="640080" y="5715000"/>
+            <a:ext cx="411480" cy="502920"/>
+          </a:xfrm>
+          <a:prstGeom prst="rect">
+            <a:avLst/>
+          </a:prstGeom>
+          <a:noFill/>
+          <a:ln/>
+        </p:spPr>
+        <p:txBody>
+          <a:bodyPr wrap="square" lIns="0" tIns="0" rIns="0" bIns="0" rtlCol="0" anchor="t"/>
+          <a:lstStyle/>
+          <a:p>
+            <a:pPr indent="0" marL="0">
+              <a:buNone/>
+            </a:pPr>
+            <a:r>
+              <a:rPr lang="en-US" sz="1800" b="1" dirty="0">
+                <a:solidFill>
+                  <a:srgbClr val="028090"/>
+                </a:solidFill>
+                <a:latin typeface="Consolas" pitchFamily="34" charset="0"/>
+                <a:ea typeface="Consolas" pitchFamily="34" charset="-122"/>
+                <a:cs typeface="Consolas" pitchFamily="34" charset="-120"/>
+              </a:rPr>
+              <a:t>5</a:t>
+            </a:r>
+            <a:endParaRPr lang="en-US" sz="1800" dirty="0"/>
+          </a:p>
+        </p:txBody>
+      </p:sp>
+      <p:sp>
+        <p:nvSpPr>
+          <p:cNvPr id="23" name="Text 21"/>
+          <p:cNvSpPr/>
+          <p:nvPr/>
+        </p:nvSpPr>
+        <p:spPr>
+          <a:xfrm>
+            <a:off x="1143000" y="5715000"/>
+            <a:ext cx="10378440" cy="274320"/>
+          </a:xfrm>
+          <a:prstGeom prst="rect">
+            <a:avLst/>
+          </a:prstGeom>
+          <a:noFill/>
+          <a:ln/>
+        </p:spPr>
+        <p:txBody>
+          <a:bodyPr wrap="square" lIns="0" tIns="0" rIns="0" bIns="0" rtlCol="0" anchor="ctr"/>
+          <a:lstStyle/>
+          <a:p>
+            <a:pPr indent="0" marL="0">
+              <a:buNone/>
+            </a:pPr>
+            <a:r>
+              <a:rPr lang="en-US" sz="1200" dirty="0">
+                <a:solidFill>
+                  <a:srgbClr val="1A1A1A"/>
+                </a:solidFill>
+                <a:latin typeface="Consolas" pitchFamily="34" charset="0"/>
+                <a:ea typeface="Consolas" pitchFamily="34" charset="-122"/>
+                <a:cs typeface="Consolas" pitchFamily="34" charset="-120"/>
+              </a:rPr>
+              <a:t>approve via telegram  →  fix applied</a:t>
+            </a:r>
+            <a:endParaRPr lang="en-US" sz="1200" dirty="0"/>
+          </a:p>
+        </p:txBody>
+      </p:sp>
+      <p:sp>
+        <p:nvSpPr>
+          <p:cNvPr id="24" name="Text 22"/>
+          <p:cNvSpPr/>
+          <p:nvPr/>
+        </p:nvSpPr>
+        <p:spPr>
+          <a:xfrm>
+            <a:off x="1143000" y="5971032"/>
+            <a:ext cx="10378440" cy="274320"/>
+          </a:xfrm>
+          <a:prstGeom prst="rect">
+            <a:avLst/>
+          </a:prstGeom>
+          <a:noFill/>
+          <a:ln/>
+        </p:spPr>
+        <p:txBody>
+          <a:bodyPr wrap="square" lIns="0" tIns="0" rIns="0" bIns="0" rtlCol="0" anchor="ctr"/>
+          <a:lstStyle/>
+          <a:p>
+            <a:pPr indent="0" marL="0">
+              <a:buNone/>
+            </a:pPr>
+            <a:r>
+              <a:rPr lang="en-US" sz="1050" dirty="0">
+                <a:solidFill>
+                  <a:srgbClr val="6E7681"/>
+                </a:solidFill>
+                <a:latin typeface="Helvetica" pitchFamily="34" charset="0"/>
+                <a:ea typeface="Helvetica" pitchFamily="34" charset="-122"/>
+                <a:cs typeface="Helvetica" pitchFamily="34" charset="-120"/>
+              </a:rPr>
+              <a:t>controller observes ConfigMap drift → reconciles → research-agent back to Running 2/2 · 🟢</a:t>
+            </a:r>
+            <a:endParaRPr lang="en-US" sz="1050" dirty="0"/>
+          </a:p>
+        </p:txBody>
+      </p:sp>
+    </p:spTree>
+  </p:cSld>
+  <p:clrMapOvr>
+    <a:masterClrMapping/>
+  </p:clrMapOvr>
+</p:sld>
+</file>
+
+<file path=ppt/slides/slide26.xml><?xml version="1.0" encoding="utf-8"?>
+<p:sld xmlns:a="http://schemas.openxmlformats.org/drawingml/2006/main" xmlns:r="http://schemas.openxmlformats.org/officeDocument/2006/relationships" xmlns:p="http://schemas.openxmlformats.org/presentationml/2006/main">
+  <p:cSld name="Slide 26">
+    <p:bg>
+      <p:bgPr>
+        <a:solidFill>
           <a:srgbClr val="0A0E1A"/>
         </a:solidFill>
       </p:bgPr>

--- a/docs/showcase/deliverables/kars-pitch-deck.pptx
+++ b/docs/showcase/deliverables/kars-pitch-deck.pptx
@@ -16652,7 +16652,7 @@
                 <a:ea typeface="Helvetica" pitchFamily="34" charset="-122"/>
                 <a:cs typeface="Helvetica" pitchFamily="34" charset="-120"/>
               </a:rPr>
-              <a:t>Drop an SRE agent onto the same cluster.  Break something on purpose.  Watch the agent ping Telegram, diagnose the cause, propose a fix, wait for the operator's approval — then apply it and confirm the recovery.</a:t>
+              <a:t>Drop an SRE agent onto the same cluster.  Roll out a workload with a classic Kubernetes mistake.  Watch the agent ping Telegram, diagnose the cause, propose the fix, wait for the operator's approval — then apply it and confirm recovery.</a:t>
             </a:r>
             <a:endParaRPr lang="en-US" sz="1800" dirty="0"/>
           </a:p>
@@ -16769,7 +16769,7 @@
                 <a:ea typeface="Helvetica" pitchFamily="34" charset="-122"/>
                 <a:cs typeface="Helvetica" pitchFamily="34" charset="-120"/>
               </a:rPr>
-              <a:t>kars-sre sandbox up · 5 read-only kubectl tools · 2 approval-gated mutators (patch / scale)</a:t>
+              <a:t>kars-sre sandbox up · read-only kubectl tools (get / describe / logs / top / events) · 2 approval-gated mutators (patch / set image)</a:t>
             </a:r>
             <a:endParaRPr lang="en-US" sz="1050" dirty="0"/>
           </a:p>
@@ -16870,7 +16870,7 @@
                 <a:ea typeface="Consolas" pitchFamily="34" charset="-122"/>
                 <a:cs typeface="Consolas" pitchFamily="34" charset="-120"/>
               </a:rPr>
-              <a:t>( something breaks )</a:t>
+              <a:t>kubectl apply -f webshop.yaml</a:t>
             </a:r>
             <a:endParaRPr lang="en-US" sz="1200" dirty="0"/>
           </a:p>
@@ -16909,7 +16909,7 @@
                 <a:ea typeface="Helvetica" pitchFamily="34" charset="-122"/>
                 <a:cs typeface="Helvetica" pitchFamily="34" charset="-120"/>
               </a:rPr>
-              <a:t>NetworkPolicy 'kars-mesh-egress' loses the :8083 allow → research-agent goes Pending</a:t>
+              <a:t>deployment 'webshop' in ns 'webshop' · image: nginx:1.27-typo  ←  pods stuck ImagePullBackOff</a:t>
             </a:r>
             <a:endParaRPr lang="en-US" sz="1050" dirty="0"/>
           </a:p>
@@ -17049,7 +17049,7 @@
                 <a:ea typeface="Helvetica" pitchFamily="34" charset="-122"/>
                 <a:cs typeface="Helvetica" pitchFamily="34" charset="-120"/>
               </a:rPr>
-              <a:t>"research-agent has been Pending for 3 min.  Likely cause:  NP kars-mesh-egress denying TCP/8083 to agentmesh-relay."</a:t>
+              <a:t>"webshop/webshop  3/3 pods ImagePullBackOff for 90 s.  Image 'nginx:1.27-typo' not found.  Closest in-use tag in the cluster:  nginx:1.27.3 (4 pods)."</a:t>
             </a:r>
             <a:endParaRPr lang="en-US" sz="1050" dirty="0"/>
           </a:p>
@@ -17189,7 +17189,7 @@
                 <a:ea typeface="Helvetica" pitchFamily="34" charset="-122"/>
                 <a:cs typeface="Helvetica" pitchFamily="34" charset="-120"/>
               </a:rPr>
-              <a:t>3 sandboxes · 1 Pending · proposed fix:  patch NetworkPolicy egress rule (port 8083)  ·  awaiting approval</a:t>
+              <a:t>1 unhealthy workload · proposed fix:  kubectl set image deploy/webshop web=nginx:1.27.3  ·  awaiting approval</a:t>
             </a:r>
             <a:endParaRPr lang="en-US" sz="1050" dirty="0"/>
           </a:p>
@@ -17290,7 +17290,7 @@
                 <a:ea typeface="Consolas" pitchFamily="34" charset="-122"/>
                 <a:cs typeface="Consolas" pitchFamily="34" charset="-120"/>
               </a:rPr>
-              <a:t>approve via telegram  →  fix applied</a:t>
+              <a:t>approve via telegram  →  patch applied</a:t>
             </a:r>
             <a:endParaRPr lang="en-US" sz="1200" dirty="0"/>
           </a:p>
@@ -17329,7 +17329,7 @@
                 <a:ea typeface="Helvetica" pitchFamily="34" charset="-122"/>
                 <a:cs typeface="Helvetica" pitchFamily="34" charset="-120"/>
               </a:rPr>
-              <a:t>controller observes ConfigMap drift → reconciles → research-agent back to Running 2/2 · 🟢</a:t>
+              <a:t>rollout completes · pods Running 3/3 · audit row written · 🟢</a:t>
             </a:r>
             <a:endParaRPr lang="en-US" sz="1050" dirty="0"/>
           </a:p>
